--- a/4/РОП/Практики_1-8/Презентации/РОП_Практическая_3_АлбахтинИВ.pptx
+++ b/4/РОП/Практики_1-8/Презентации/РОП_Практическая_3_АлбахтинИВ.pptx
@@ -2,18 +2,18 @@
 <file path=ppt/presentation.xml><?xml version="1.0" encoding="utf-8"?>
 <p:presentation xmlns:p="http://schemas.openxmlformats.org/presentationml/2006/main">
   <p:sldMasterIdLst>
-    <p:sldMasterId xmlns:r="http://schemas.openxmlformats.org/officeDocument/2006/relationships" id="2147483648" r:id="Rc5b92f9c95b84e3c"/>
+    <p:sldMasterId xmlns:r="http://schemas.openxmlformats.org/officeDocument/2006/relationships" id="2147483648" r:id="Rc4fa738008e643a1"/>
   </p:sldMasterIdLst>
   <p:notesMasterIdLst>
-    <p:notesMasterId xmlns:r="http://schemas.openxmlformats.org/officeDocument/2006/relationships" r:id="Rb4d10fc062654540"/>
+    <p:notesMasterId xmlns:r="http://schemas.openxmlformats.org/officeDocument/2006/relationships" r:id="Rf2789c2725bf484f"/>
   </p:notesMasterIdLst>
   <p:sldIdLst>
-    <p:sldId xmlns:r="http://schemas.openxmlformats.org/officeDocument/2006/relationships" id="256" r:id="R5e6bad7d91c8490d"/>
-    <p:sldId xmlns:r="http://schemas.openxmlformats.org/officeDocument/2006/relationships" id="257" r:id="R4727ca9e8b044c60"/>
-    <p:sldId xmlns:r="http://schemas.openxmlformats.org/officeDocument/2006/relationships" id="258" r:id="R2b57a35ba55e41b2"/>
-    <p:sldId xmlns:r="http://schemas.openxmlformats.org/officeDocument/2006/relationships" id="259" r:id="Rd3421a50f7dd4728"/>
-    <p:sldId xmlns:r="http://schemas.openxmlformats.org/officeDocument/2006/relationships" id="260" r:id="Rd1909418e4e14301"/>
-    <p:sldId xmlns:r="http://schemas.openxmlformats.org/officeDocument/2006/relationships" id="261" r:id="R8f3f87a7d45249c4"/>
+    <p:sldId xmlns:r="http://schemas.openxmlformats.org/officeDocument/2006/relationships" id="256" r:id="R210ed315d38443ab"/>
+    <p:sldId xmlns:r="http://schemas.openxmlformats.org/officeDocument/2006/relationships" id="257" r:id="R4cda145909814dc8"/>
+    <p:sldId xmlns:r="http://schemas.openxmlformats.org/officeDocument/2006/relationships" id="258" r:id="R1da33e6693824e5c"/>
+    <p:sldId xmlns:r="http://schemas.openxmlformats.org/officeDocument/2006/relationships" id="259" r:id="R844adaadba284898"/>
+    <p:sldId xmlns:r="http://schemas.openxmlformats.org/officeDocument/2006/relationships" id="260" r:id="R185b62f5690b4baf"/>
+    <p:sldId xmlns:r="http://schemas.openxmlformats.org/officeDocument/2006/relationships" id="261" r:id="Rb90c3dc8006b4565"/>
   </p:sldIdLst>
   <p:sldSz cx="12192000" cy="6858000"/>
   <p:notesSz cx="6858000" cy="9144000"/>
@@ -895,7 +895,7 @@
   </p:cSld>
   <p:clrMap bg1="lt1" tx1="dk1" bg2="lt2" tx2="dk2" accent1="accent1" accent2="accent2" accent3="accent3" accent4="accent4" accent5="accent5" accent6="accent6" hlink="hlink" folHlink="folHlink"/>
   <p:sldLayoutIdLst>
-    <p:sldLayoutId xmlns:r="http://schemas.openxmlformats.org/officeDocument/2006/relationships" id="2147483649" r:id="R99cbec59d5354b06"/>
+    <p:sldLayoutId xmlns:r="http://schemas.openxmlformats.org/officeDocument/2006/relationships" id="2147483649" r:id="R62a907feaca74f47"/>
   </p:sldLayoutIdLst>
   <p:txStyles>
     <p:titleStyle>
@@ -1446,7 +1446,7 @@
           <p:cNvPr id="5" name="">
             <a:extLst xmlns:a="http://schemas.openxmlformats.org/drawingml/2006/main">
               <a:ext uri="{FF2B5EF4-FFF2-40B4-BE49-F238E27FC236}">
-                <a16:creationId xmlns:a16="http://schemas.microsoft.com/office/drawing/2014/main" id="{61A5C163-5EE5-4A84-9831-6B66318AD8D0}"/>
+                <a16:creationId xmlns:a16="http://schemas.microsoft.com/office/drawing/2014/main" id="{C41DAD02-CE48-4E74-8D18-7AC4E444EB40}"/>
               </a:ext>
             </a:extLst>
           </p:cNvPr>
@@ -1457,8 +1457,8 @@
         </p:nvSpPr>
         <p:spPr>
           <a:xfrm xmlns:a="http://schemas.openxmlformats.org/drawingml/2006/main">
-            <a:off x="552450" y="333375"/>
-            <a:ext cx="11049000" cy="857250"/>
+            <a:off x="552450" y="266700"/>
+            <a:ext cx="11049000" cy="742950"/>
           </a:xfrm>
           <a:prstGeom xmlns:a="http://schemas.openxmlformats.org/drawingml/2006/main" prst="rect">
             <a:avLst/>
@@ -1469,13 +1469,13 @@
           </a:ln>
         </p:spPr>
         <p:txBody>
-          <a:bodyPr xmlns:a="http://schemas.openxmlformats.org/drawingml/2006/main">
+          <a:bodyPr xmlns:a="http://schemas.openxmlformats.org/drawingml/2006/main" anchor="ctr">
             <a:noAutofit/>
           </a:bodyPr>
           <a:lstStyle xmlns:a="http://schemas.openxmlformats.org/drawingml/2006/main"/>
           <a:p xmlns:a="http://schemas.openxmlformats.org/drawingml/2006/main">
-            <a:pPr>
-              <a:defRPr sz="3150" b="1">
+            <a:pPr algn="l">
+              <a:defRPr sz="2700" b="1">
                 <a:solidFill>
                   <a:srgbClr val="161616"/>
                 </a:solidFill>
@@ -1485,7 +1485,7 @@
               </a:defRPr>
             </a:pPr>
             <a:r>
-              <a:rPr sz="3150" b="1">
+              <a:rPr sz="2700" b="1">
                 <a:solidFill>
                   <a:srgbClr val="161616"/>
                 </a:solidFill>
@@ -1503,7 +1503,7 @@
           <p:cNvPr id="2" name="">
             <a:extLst xmlns:a="http://schemas.openxmlformats.org/drawingml/2006/main">
               <a:ext uri="{FF2B5EF4-FFF2-40B4-BE49-F238E27FC236}">
-                <a16:creationId xmlns:a16="http://schemas.microsoft.com/office/drawing/2014/main" id="{918620BE-3847-4E6D-88C9-BB7C6FF66ECE}"/>
+                <a16:creationId xmlns:a16="http://schemas.microsoft.com/office/drawing/2014/main" id="{7C41D3E7-4BC6-4B34-B5C6-8898A21A02D4}"/>
               </a:ext>
             </a:extLst>
           </p:cNvPr>
@@ -1560,7 +1560,7 @@
           <p:cNvPr id="3" name="">
             <a:extLst xmlns:a="http://schemas.openxmlformats.org/drawingml/2006/main">
               <a:ext uri="{FF2B5EF4-FFF2-40B4-BE49-F238E27FC236}">
-                <a16:creationId xmlns:a16="http://schemas.microsoft.com/office/drawing/2014/main" id="{7C09CFEB-B6F7-4DDC-9D50-AE9CF54BADB3}"/>
+                <a16:creationId xmlns:a16="http://schemas.microsoft.com/office/drawing/2014/main" id="{534B92C6-BC88-43F0-8F39-7F41A0051474}"/>
               </a:ext>
             </a:extLst>
           </p:cNvPr>
@@ -1607,7 +1607,7 @@
                 <a:ea typeface="Arial"/>
                 <a:cs typeface="Arial"/>
               </a:rPr>
-              <a:t>29 сущностей обеспечивают BOM, предложения, версии карточек и историю.</a:t>
+              <a:t>29 сущностей обеспечивают модельный ряд, предложения, версии карточек и историю.</a:t>
             </a:r>
           </a:p>
         </p:txBody>
@@ -1617,7 +1617,7 @@
           <p:cNvPr id="4" name="">
             <a:extLst xmlns:a="http://schemas.openxmlformats.org/drawingml/2006/main">
               <a:ext uri="{FF2B5EF4-FFF2-40B4-BE49-F238E27FC236}">
-                <a16:creationId xmlns:a16="http://schemas.microsoft.com/office/drawing/2014/main" id="{CFF3C8FA-1468-42D8-BAF3-95A88D2E49CB}"/>
+                <a16:creationId xmlns:a16="http://schemas.microsoft.com/office/drawing/2014/main" id="{336B9807-B46D-4328-A3F6-C734BDC48A24}"/>
               </a:ext>
             </a:extLst>
           </p:cNvPr>
@@ -1695,7 +1695,7 @@
     </p:spTree>
     <p:extLst>
       <p:ext uri="{BB962C8B-B14F-4D97-AF65-F5344CB8AC3E}">
-        <p14:creationId xmlns:p14="http://schemas.microsoft.com/office/powerpoint/2010/main" val="351013426"/>
+        <p14:creationId xmlns:p14="http://schemas.microsoft.com/office/powerpoint/2010/main" val="2124358290"/>
       </p:ext>
     </p:extLst>
   </p:cSld>
@@ -1726,7 +1726,7 @@
           <p:cNvPr id="10" name="">
             <a:extLst xmlns:a="http://schemas.openxmlformats.org/drawingml/2006/main">
               <a:ext uri="{FF2B5EF4-FFF2-40B4-BE49-F238E27FC236}">
-                <a16:creationId xmlns:a16="http://schemas.microsoft.com/office/drawing/2014/main" id="{5549E195-0D1E-4327-9F7F-CEFFBE956F57}"/>
+                <a16:creationId xmlns:a16="http://schemas.microsoft.com/office/drawing/2014/main" id="{EE6B2488-8BF6-4186-9AEE-5D45F0B54A62}"/>
               </a:ext>
             </a:extLst>
           </p:cNvPr>
@@ -1737,8 +1737,8 @@
         </p:nvSpPr>
         <p:spPr>
           <a:xfrm xmlns:a="http://schemas.openxmlformats.org/drawingml/2006/main">
-            <a:off x="552450" y="333375"/>
-            <a:ext cx="11049000" cy="857250"/>
+            <a:off x="552450" y="266700"/>
+            <a:ext cx="11049000" cy="742950"/>
           </a:xfrm>
           <a:prstGeom xmlns:a="http://schemas.openxmlformats.org/drawingml/2006/main" prst="rect">
             <a:avLst/>
@@ -1749,13 +1749,13 @@
           </a:ln>
         </p:spPr>
         <p:txBody>
-          <a:bodyPr xmlns:a="http://schemas.openxmlformats.org/drawingml/2006/main">
+          <a:bodyPr xmlns:a="http://schemas.openxmlformats.org/drawingml/2006/main" anchor="ctr">
             <a:noAutofit/>
           </a:bodyPr>
           <a:lstStyle xmlns:a="http://schemas.openxmlformats.org/drawingml/2006/main"/>
           <a:p xmlns:a="http://schemas.openxmlformats.org/drawingml/2006/main">
-            <a:pPr>
-              <a:defRPr sz="3150" b="1">
+            <a:pPr algn="l">
+              <a:defRPr sz="2700" b="1">
                 <a:solidFill>
                   <a:srgbClr val="161616"/>
                 </a:solidFill>
@@ -1765,7 +1765,7 @@
               </a:defRPr>
             </a:pPr>
             <a:r>
-              <a:rPr sz="3150" b="1">
+              <a:rPr sz="2700" b="1">
                 <a:solidFill>
                   <a:srgbClr val="161616"/>
                 </a:solidFill>
@@ -1783,7 +1783,7 @@
           <p:cNvPr id="2" name="">
             <a:extLst xmlns:a="http://schemas.openxmlformats.org/drawingml/2006/main">
               <a:ext uri="{FF2B5EF4-FFF2-40B4-BE49-F238E27FC236}">
-                <a16:creationId xmlns:a16="http://schemas.microsoft.com/office/drawing/2014/main" id="{3B02BD90-1B08-4F7D-ACD9-50D3CFC11DD7}"/>
+                <a16:creationId xmlns:a16="http://schemas.microsoft.com/office/drawing/2014/main" id="{084E2F9C-6BF1-4246-A9A8-E4BC3CF5F87F}"/>
               </a:ext>
             </a:extLst>
           </p:cNvPr>
@@ -1834,7 +1834,30 @@
                 <a:ea typeface="Arial"/>
                 <a:cs typeface="Arial"/>
               </a:rPr>
-              <a:t>BOM</a:t>
+              <a:t>Модельный</a:t>
+            </a:r>
+          </a:p>
+          <a:p xmlns:a="http://schemas.openxmlformats.org/drawingml/2006/main">
+            <a:pPr algn="ctr">
+              <a:defRPr sz="1875">
+                <a:solidFill>
+                  <a:srgbClr val="111111"/>
+                </a:solidFill>
+                <a:latin typeface="Arial"/>
+                <a:ea typeface="Arial"/>
+                <a:cs typeface="Arial"/>
+              </a:defRPr>
+            </a:pPr>
+            <a:r>
+              <a:rPr sz="1875">
+                <a:solidFill>
+                  <a:srgbClr val="111111"/>
+                </a:solidFill>
+                <a:latin typeface="Arial"/>
+                <a:ea typeface="Arial"/>
+                <a:cs typeface="Arial"/>
+              </a:rPr>
+              <a:t>ряд</a:t>
             </a:r>
           </a:p>
         </p:txBody>
@@ -1844,7 +1867,7 @@
           <p:cNvPr id="3" name="">
             <a:extLst xmlns:a="http://schemas.openxmlformats.org/drawingml/2006/main">
               <a:ext uri="{FF2B5EF4-FFF2-40B4-BE49-F238E27FC236}">
-                <a16:creationId xmlns:a16="http://schemas.microsoft.com/office/drawing/2014/main" id="{9DEE4877-9132-444B-9711-DF75688090A3}"/>
+                <a16:creationId xmlns:a16="http://schemas.microsoft.com/office/drawing/2014/main" id="{0850F476-88FC-4B48-BC7F-486243762ADB}"/>
               </a:ext>
             </a:extLst>
           </p:cNvPr>
@@ -1874,7 +1897,7 @@
           <p:cNvPr id="4" name="">
             <a:extLst xmlns:a="http://schemas.openxmlformats.org/drawingml/2006/main">
               <a:ext uri="{FF2B5EF4-FFF2-40B4-BE49-F238E27FC236}">
-                <a16:creationId xmlns:a16="http://schemas.microsoft.com/office/drawing/2014/main" id="{9EDCBEDB-7BE4-48E6-B84C-F06233002C3D}"/>
+                <a16:creationId xmlns:a16="http://schemas.microsoft.com/office/drawing/2014/main" id="{D3AA9E2A-9D5D-441B-A844-D56DC6582BA7}"/>
               </a:ext>
             </a:extLst>
           </p:cNvPr>
@@ -1948,7 +1971,7 @@
                 <a:ea typeface="Arial"/>
                 <a:cs typeface="Arial"/>
               </a:rPr>
-              <a:t>BOM</a:t>
+              <a:t>модельного ряда</a:t>
             </a:r>
           </a:p>
         </p:txBody>
@@ -1958,7 +1981,7 @@
           <p:cNvPr id="5" name="">
             <a:extLst xmlns:a="http://schemas.openxmlformats.org/drawingml/2006/main">
               <a:ext uri="{FF2B5EF4-FFF2-40B4-BE49-F238E27FC236}">
-                <a16:creationId xmlns:a16="http://schemas.microsoft.com/office/drawing/2014/main" id="{CAC49BFF-BE68-49C3-A7AF-98832D32B958}"/>
+                <a16:creationId xmlns:a16="http://schemas.microsoft.com/office/drawing/2014/main" id="{C9488C8A-0BBC-4C19-9AD9-8C02A7241FD8}"/>
               </a:ext>
             </a:extLst>
           </p:cNvPr>
@@ -1988,7 +2011,7 @@
           <p:cNvPr id="6" name="">
             <a:extLst xmlns:a="http://schemas.openxmlformats.org/drawingml/2006/main">
               <a:ext uri="{FF2B5EF4-FFF2-40B4-BE49-F238E27FC236}">
-                <a16:creationId xmlns:a16="http://schemas.microsoft.com/office/drawing/2014/main" id="{C17F7601-964E-4D98-BE0F-207A27FAF8DE}"/>
+                <a16:creationId xmlns:a16="http://schemas.microsoft.com/office/drawing/2014/main" id="{38536D5A-5334-4A1C-B2A3-F21E0F1A5100}"/>
               </a:ext>
             </a:extLst>
           </p:cNvPr>
@@ -2072,7 +2095,7 @@
           <p:cNvPr id="7" name="">
             <a:extLst xmlns:a="http://schemas.openxmlformats.org/drawingml/2006/main">
               <a:ext uri="{FF2B5EF4-FFF2-40B4-BE49-F238E27FC236}">
-                <a16:creationId xmlns:a16="http://schemas.microsoft.com/office/drawing/2014/main" id="{E51B47DC-CAFA-49E1-BEF5-16608E615C8A}"/>
+                <a16:creationId xmlns:a16="http://schemas.microsoft.com/office/drawing/2014/main" id="{28025B3C-F519-421E-87B0-E08D0240FB9B}"/>
               </a:ext>
             </a:extLst>
           </p:cNvPr>
@@ -2102,7 +2125,7 @@
           <p:cNvPr id="8" name="">
             <a:extLst xmlns:a="http://schemas.openxmlformats.org/drawingml/2006/main">
               <a:ext uri="{FF2B5EF4-FFF2-40B4-BE49-F238E27FC236}">
-                <a16:creationId xmlns:a16="http://schemas.microsoft.com/office/drawing/2014/main" id="{3B8FC02C-3728-41E3-BD54-CC8915C1FBB7}"/>
+                <a16:creationId xmlns:a16="http://schemas.microsoft.com/office/drawing/2014/main" id="{A3D4BC0F-0C70-4959-B7A3-303C0D168196}"/>
               </a:ext>
             </a:extLst>
           </p:cNvPr>
@@ -2163,7 +2186,7 @@
           <p:cNvPr id="9" name="">
             <a:extLst xmlns:a="http://schemas.openxmlformats.org/drawingml/2006/main">
               <a:ext uri="{FF2B5EF4-FFF2-40B4-BE49-F238E27FC236}">
-                <a16:creationId xmlns:a16="http://schemas.microsoft.com/office/drawing/2014/main" id="{77A4F1E0-1185-47D4-A762-3259C1488D60}"/>
+                <a16:creationId xmlns:a16="http://schemas.microsoft.com/office/drawing/2014/main" id="{4302C2AC-8B73-47D8-8ABC-D615B76EF221}"/>
               </a:ext>
             </a:extLst>
           </p:cNvPr>
@@ -2210,7 +2233,7 @@
                 <a:ea typeface="Arial"/>
                 <a:cs typeface="Arial"/>
               </a:rPr>
-              <a:t>Публикация относится к неизменяемому снимку. Новая BOM не перезаписывает историю.</a:t>
+              <a:t>Публикация относится к неизменяемому снимку. Новая версия модельного ряда не перезаписывает историю.</a:t>
             </a:r>
           </a:p>
         </p:txBody>
@@ -2218,7 +2241,7 @@
     </p:spTree>
     <p:extLst>
       <p:ext uri="{BB962C8B-B14F-4D97-AF65-F5344CB8AC3E}">
-        <p14:creationId xmlns:p14="http://schemas.microsoft.com/office/powerpoint/2010/main" val="614314907"/>
+        <p14:creationId xmlns:p14="http://schemas.microsoft.com/office/powerpoint/2010/main" val="1031011956"/>
       </p:ext>
     </p:extLst>
   </p:cSld>
@@ -2249,7 +2272,7 @@
           <p:cNvPr id="3" name="">
             <a:extLst xmlns:a="http://schemas.openxmlformats.org/drawingml/2006/main">
               <a:ext uri="{FF2B5EF4-FFF2-40B4-BE49-F238E27FC236}">
-                <a16:creationId xmlns:a16="http://schemas.microsoft.com/office/drawing/2014/main" id="{108B7ACF-536C-4BCD-B0B3-07818D8EC1B9}"/>
+                <a16:creationId xmlns:a16="http://schemas.microsoft.com/office/drawing/2014/main" id="{8AB0E7D4-36B2-488E-A344-F22D2B697808}"/>
               </a:ext>
             </a:extLst>
           </p:cNvPr>
@@ -2260,8 +2283,8 @@
         </p:nvSpPr>
         <p:spPr>
           <a:xfrm xmlns:a="http://schemas.openxmlformats.org/drawingml/2006/main">
-            <a:off x="552450" y="333375"/>
-            <a:ext cx="11049000" cy="857250"/>
+            <a:off x="552450" y="266700"/>
+            <a:ext cx="11049000" cy="742950"/>
           </a:xfrm>
           <a:prstGeom xmlns:a="http://schemas.openxmlformats.org/drawingml/2006/main" prst="rect">
             <a:avLst/>
@@ -2272,13 +2295,13 @@
           </a:ln>
         </p:spPr>
         <p:txBody>
-          <a:bodyPr xmlns:a="http://schemas.openxmlformats.org/drawingml/2006/main">
+          <a:bodyPr xmlns:a="http://schemas.openxmlformats.org/drawingml/2006/main" anchor="ctr">
             <a:noAutofit/>
           </a:bodyPr>
           <a:lstStyle xmlns:a="http://schemas.openxmlformats.org/drawingml/2006/main"/>
           <a:p xmlns:a="http://schemas.openxmlformats.org/drawingml/2006/main">
-            <a:pPr>
-              <a:defRPr sz="3150" b="1">
+            <a:pPr algn="l">
+              <a:defRPr sz="2700" b="1">
                 <a:solidFill>
                   <a:srgbClr val="161616"/>
                 </a:solidFill>
@@ -2288,7 +2311,7 @@
               </a:defRPr>
             </a:pPr>
             <a:r>
-              <a:rPr sz="3150" b="1">
+              <a:rPr sz="2700" b="1">
                 <a:solidFill>
                   <a:srgbClr val="161616"/>
                 </a:solidFill>
@@ -2409,7 +2432,7 @@
                           <a:ea typeface="Arial"/>
                           <a:cs typeface="Arial"/>
                         </a:rPr>
-                        <a:t>bom_slot</a:t>
+                        <a:t>model_line_slot</a:t>
                       </a:r>
                     </a:p>
                   </a:txBody>
@@ -2679,7 +2702,7 @@
                           <a:ea typeface="Arial"/>
                           <a:cs typeface="Arial"/>
                         </a:rPr>
-                        <a:t>Одна версия BOM</a:t>
+                        <a:t>Одна версия модельного ряда</a:t>
                       </a:r>
                     </a:p>
                   </a:txBody>
@@ -2697,7 +2720,7 @@
     </p:spTree>
     <p:extLst>
       <p:ext uri="{BB962C8B-B14F-4D97-AF65-F5344CB8AC3E}">
-        <p14:creationId xmlns:p14="http://schemas.microsoft.com/office/powerpoint/2010/main" val="742042168"/>
+        <p14:creationId xmlns:p14="http://schemas.microsoft.com/office/powerpoint/2010/main" val="848479714"/>
       </p:ext>
     </p:extLst>
   </p:cSld>
@@ -2728,7 +2751,7 @@
           <p:cNvPr id="8" name="">
             <a:extLst xmlns:a="http://schemas.openxmlformats.org/drawingml/2006/main">
               <a:ext uri="{FF2B5EF4-FFF2-40B4-BE49-F238E27FC236}">
-                <a16:creationId xmlns:a16="http://schemas.microsoft.com/office/drawing/2014/main" id="{0114D50F-BC10-400D-A55C-5614572E5496}"/>
+                <a16:creationId xmlns:a16="http://schemas.microsoft.com/office/drawing/2014/main" id="{BC5B4F82-6760-443F-85E6-C58837895FDD}"/>
               </a:ext>
             </a:extLst>
           </p:cNvPr>
@@ -2739,8 +2762,8 @@
         </p:nvSpPr>
         <p:spPr>
           <a:xfrm xmlns:a="http://schemas.openxmlformats.org/drawingml/2006/main">
-            <a:off x="552450" y="333375"/>
-            <a:ext cx="11049000" cy="857250"/>
+            <a:off x="552450" y="266700"/>
+            <a:ext cx="11049000" cy="742950"/>
           </a:xfrm>
           <a:prstGeom xmlns:a="http://schemas.openxmlformats.org/drawingml/2006/main" prst="rect">
             <a:avLst/>
@@ -2751,13 +2774,13 @@
           </a:ln>
         </p:spPr>
         <p:txBody>
-          <a:bodyPr xmlns:a="http://schemas.openxmlformats.org/drawingml/2006/main">
+          <a:bodyPr xmlns:a="http://schemas.openxmlformats.org/drawingml/2006/main" anchor="ctr">
             <a:noAutofit/>
           </a:bodyPr>
           <a:lstStyle xmlns:a="http://schemas.openxmlformats.org/drawingml/2006/main"/>
           <a:p xmlns:a="http://schemas.openxmlformats.org/drawingml/2006/main">
-            <a:pPr>
-              <a:defRPr sz="3150" b="1">
+            <a:pPr algn="l">
+              <a:defRPr sz="2700" b="1">
                 <a:solidFill>
                   <a:srgbClr val="161616"/>
                 </a:solidFill>
@@ -2767,7 +2790,7 @@
               </a:defRPr>
             </a:pPr>
             <a:r>
-              <a:rPr sz="3150" b="1">
+              <a:rPr sz="2700" b="1">
                 <a:solidFill>
                   <a:srgbClr val="161616"/>
                 </a:solidFill>
@@ -2785,7 +2808,7 @@
           <p:cNvPr id="2" name="">
             <a:extLst xmlns:a="http://schemas.openxmlformats.org/drawingml/2006/main">
               <a:ext uri="{FF2B5EF4-FFF2-40B4-BE49-F238E27FC236}">
-                <a16:creationId xmlns:a16="http://schemas.microsoft.com/office/drawing/2014/main" id="{70B7BEE3-4548-43E5-9345-32F7EE9FD339}"/>
+                <a16:creationId xmlns:a16="http://schemas.microsoft.com/office/drawing/2014/main" id="{9113E17C-76A0-4E2A-B23E-9AA8BA733D08}"/>
               </a:ext>
             </a:extLst>
           </p:cNvPr>
@@ -2836,7 +2859,7 @@
                 <a:ea typeface="Arial"/>
                 <a:cs typeface="Arial"/>
               </a:rPr>
-              <a:t>BOM</a:t>
+              <a:t>Префикс MR</a:t>
             </a:r>
           </a:p>
         </p:txBody>
@@ -2846,7 +2869,7 @@
           <p:cNvPr id="3" name="">
             <a:extLst xmlns:a="http://schemas.openxmlformats.org/drawingml/2006/main">
               <a:ext uri="{FF2B5EF4-FFF2-40B4-BE49-F238E27FC236}">
-                <a16:creationId xmlns:a16="http://schemas.microsoft.com/office/drawing/2014/main" id="{F257777B-ED14-4652-8CD9-E8F697736BAC}"/>
+                <a16:creationId xmlns:a16="http://schemas.microsoft.com/office/drawing/2014/main" id="{ED8C56E1-05A8-49F9-9AD6-6292C0FBBE31}"/>
               </a:ext>
             </a:extLst>
           </p:cNvPr>
@@ -2876,7 +2899,7 @@
           <p:cNvPr id="4" name="">
             <a:extLst xmlns:a="http://schemas.openxmlformats.org/drawingml/2006/main">
               <a:ext uri="{FF2B5EF4-FFF2-40B4-BE49-F238E27FC236}">
-                <a16:creationId xmlns:a16="http://schemas.microsoft.com/office/drawing/2014/main" id="{BE25C873-316B-4D22-BC9C-BD97CCB8E2E1}"/>
+                <a16:creationId xmlns:a16="http://schemas.microsoft.com/office/drawing/2014/main" id="{6A83F78B-6B66-4487-9776-F7C066CC9405}"/>
               </a:ext>
             </a:extLst>
           </p:cNvPr>
@@ -2927,7 +2950,7 @@
                 <a:ea typeface="Arial"/>
                 <a:cs typeface="Arial"/>
               </a:rPr>
-              <a:t>000153</a:t>
+              <a:t>Номер 000153</a:t>
             </a:r>
           </a:p>
         </p:txBody>
@@ -2937,7 +2960,7 @@
           <p:cNvPr id="5" name="">
             <a:extLst xmlns:a="http://schemas.openxmlformats.org/drawingml/2006/main">
               <a:ext uri="{FF2B5EF4-FFF2-40B4-BE49-F238E27FC236}">
-                <a16:creationId xmlns:a16="http://schemas.microsoft.com/office/drawing/2014/main" id="{C22F4DC1-F2DD-497E-BDF1-C68E6D2D386A}"/>
+                <a16:creationId xmlns:a16="http://schemas.microsoft.com/office/drawing/2014/main" id="{E1DE5AF1-E2BB-45B6-AD4F-0FB94E9C7A5A}"/>
               </a:ext>
             </a:extLst>
           </p:cNvPr>
@@ -2967,7 +2990,7 @@
           <p:cNvPr id="6" name="">
             <a:extLst xmlns:a="http://schemas.openxmlformats.org/drawingml/2006/main">
               <a:ext uri="{FF2B5EF4-FFF2-40B4-BE49-F238E27FC236}">
-                <a16:creationId xmlns:a16="http://schemas.microsoft.com/office/drawing/2014/main" id="{B978B9AC-5558-4FBC-A11B-A8233DF25C27}"/>
+                <a16:creationId xmlns:a16="http://schemas.microsoft.com/office/drawing/2014/main" id="{BE22C510-082E-46B3-BCC8-78211A22D8B2}"/>
               </a:ext>
             </a:extLst>
           </p:cNvPr>
@@ -3028,7 +3051,7 @@
           <p:cNvPr id="7" name="">
             <a:extLst xmlns:a="http://schemas.openxmlformats.org/drawingml/2006/main">
               <a:ext uri="{FF2B5EF4-FFF2-40B4-BE49-F238E27FC236}">
-                <a16:creationId xmlns:a16="http://schemas.microsoft.com/office/drawing/2014/main" id="{6EB1DDA2-2E07-46BB-9E9D-FCC9B1B7B4FD}"/>
+                <a16:creationId xmlns:a16="http://schemas.microsoft.com/office/drawing/2014/main" id="{95C80615-4E3C-473D-ACBA-2FA7AA3BD45B}"/>
               </a:ext>
             </a:extLst>
           </p:cNvPr>
@@ -3075,7 +3098,7 @@
                 <a:ea typeface="Arial"/>
                 <a:cs typeface="Arial"/>
               </a:rPr>
-              <a:t>Префикс и номер образуют BOM-000153. Номер версии хранится отдельно. UNIQUE защищает от повторов.</a:t>
+              <a:t>Префикс и номер образуют MR-000153. Номер версии хранится отдельно. UNIQUE защищает от повторов.</a:t>
             </a:r>
           </a:p>
         </p:txBody>
@@ -3083,7 +3106,7 @@
     </p:spTree>
     <p:extLst>
       <p:ext uri="{BB962C8B-B14F-4D97-AF65-F5344CB8AC3E}">
-        <p14:creationId xmlns:p14="http://schemas.microsoft.com/office/powerpoint/2010/main" val="999872614"/>
+        <p14:creationId xmlns:p14="http://schemas.microsoft.com/office/powerpoint/2010/main" val="1074456735"/>
       </p:ext>
     </p:extLst>
   </p:cSld>
@@ -3114,7 +3137,7 @@
           <p:cNvPr id="3" name="">
             <a:extLst xmlns:a="http://schemas.openxmlformats.org/drawingml/2006/main">
               <a:ext uri="{FF2B5EF4-FFF2-40B4-BE49-F238E27FC236}">
-                <a16:creationId xmlns:a16="http://schemas.microsoft.com/office/drawing/2014/main" id="{FD2BF7A5-E96C-43E0-AB68-4DB159DF4934}"/>
+                <a16:creationId xmlns:a16="http://schemas.microsoft.com/office/drawing/2014/main" id="{2AECC2B9-21D9-432B-AC01-E529F532879A}"/>
               </a:ext>
             </a:extLst>
           </p:cNvPr>
@@ -3125,8 +3148,8 @@
         </p:nvSpPr>
         <p:spPr>
           <a:xfrm xmlns:a="http://schemas.openxmlformats.org/drawingml/2006/main">
-            <a:off x="552450" y="333375"/>
-            <a:ext cx="11049000" cy="857250"/>
+            <a:off x="552450" y="266700"/>
+            <a:ext cx="11049000" cy="742950"/>
           </a:xfrm>
           <a:prstGeom xmlns:a="http://schemas.openxmlformats.org/drawingml/2006/main" prst="rect">
             <a:avLst/>
@@ -3137,13 +3160,13 @@
           </a:ln>
         </p:spPr>
         <p:txBody>
-          <a:bodyPr xmlns:a="http://schemas.openxmlformats.org/drawingml/2006/main">
+          <a:bodyPr xmlns:a="http://schemas.openxmlformats.org/drawingml/2006/main" anchor="ctr">
             <a:noAutofit/>
           </a:bodyPr>
           <a:lstStyle xmlns:a="http://schemas.openxmlformats.org/drawingml/2006/main"/>
           <a:p xmlns:a="http://schemas.openxmlformats.org/drawingml/2006/main">
-            <a:pPr>
-              <a:defRPr sz="3150" b="1">
+            <a:pPr algn="l">
+              <a:defRPr sz="2700" b="1">
                 <a:solidFill>
                   <a:srgbClr val="161616"/>
                 </a:solidFill>
@@ -3153,7 +3176,7 @@
               </a:defRPr>
             </a:pPr>
             <a:r>
-              <a:rPr sz="3150" b="1">
+              <a:rPr sz="2700" b="1">
                 <a:solidFill>
                   <a:srgbClr val="161616"/>
                 </a:solidFill>
@@ -3491,7 +3514,7 @@
     </p:spTree>
     <p:extLst>
       <p:ext uri="{BB962C8B-B14F-4D97-AF65-F5344CB8AC3E}">
-        <p14:creationId xmlns:p14="http://schemas.microsoft.com/office/powerpoint/2010/main" val="1763806460"/>
+        <p14:creationId xmlns:p14="http://schemas.microsoft.com/office/powerpoint/2010/main" val="1265282419"/>
       </p:ext>
     </p:extLst>
   </p:cSld>
@@ -3522,7 +3545,7 @@
           <p:cNvPr id="6" name="">
             <a:extLst xmlns:a="http://schemas.openxmlformats.org/drawingml/2006/main">
               <a:ext uri="{FF2B5EF4-FFF2-40B4-BE49-F238E27FC236}">
-                <a16:creationId xmlns:a16="http://schemas.microsoft.com/office/drawing/2014/main" id="{05E527F0-ED91-46B3-B708-128C80C3B1A8}"/>
+                <a16:creationId xmlns:a16="http://schemas.microsoft.com/office/drawing/2014/main" id="{6DB7BA9D-84E6-4C72-9E79-11692B269F55}"/>
               </a:ext>
             </a:extLst>
           </p:cNvPr>
@@ -3533,8 +3556,8 @@
         </p:nvSpPr>
         <p:spPr>
           <a:xfrm xmlns:a="http://schemas.openxmlformats.org/drawingml/2006/main">
-            <a:off x="552450" y="333375"/>
-            <a:ext cx="11049000" cy="857250"/>
+            <a:off x="552450" y="266700"/>
+            <a:ext cx="11049000" cy="742950"/>
           </a:xfrm>
           <a:prstGeom xmlns:a="http://schemas.openxmlformats.org/drawingml/2006/main" prst="rect">
             <a:avLst/>
@@ -3545,13 +3568,13 @@
           </a:ln>
         </p:spPr>
         <p:txBody>
-          <a:bodyPr xmlns:a="http://schemas.openxmlformats.org/drawingml/2006/main">
+          <a:bodyPr xmlns:a="http://schemas.openxmlformats.org/drawingml/2006/main" anchor="ctr">
             <a:noAutofit/>
           </a:bodyPr>
           <a:lstStyle xmlns:a="http://schemas.openxmlformats.org/drawingml/2006/main"/>
           <a:p xmlns:a="http://schemas.openxmlformats.org/drawingml/2006/main">
-            <a:pPr>
-              <a:defRPr sz="3150" b="1">
+            <a:pPr algn="l">
+              <a:defRPr sz="2700" b="1">
                 <a:solidFill>
                   <a:srgbClr val="161616"/>
                 </a:solidFill>
@@ -3561,7 +3584,7 @@
               </a:defRPr>
             </a:pPr>
             <a:r>
-              <a:rPr sz="3150" b="1">
+              <a:rPr sz="2700" b="1">
                 <a:solidFill>
                   <a:srgbClr val="161616"/>
                 </a:solidFill>
@@ -3579,7 +3602,7 @@
           <p:cNvPr id="2" name="">
             <a:extLst xmlns:a="http://schemas.openxmlformats.org/drawingml/2006/main">
               <a:ext uri="{FF2B5EF4-FFF2-40B4-BE49-F238E27FC236}">
-                <a16:creationId xmlns:a16="http://schemas.microsoft.com/office/drawing/2014/main" id="{9673FD3F-5788-4EC0-9BBA-B59DCF66F1E2}"/>
+                <a16:creationId xmlns:a16="http://schemas.microsoft.com/office/drawing/2014/main" id="{BEB76A70-AB43-47F7-9847-AAD9341B55EA}"/>
               </a:ext>
             </a:extLst>
           </p:cNvPr>
@@ -3636,7 +3659,7 @@
           <p:cNvPr id="3" name="">
             <a:extLst xmlns:a="http://schemas.openxmlformats.org/drawingml/2006/main">
               <a:ext uri="{FF2B5EF4-FFF2-40B4-BE49-F238E27FC236}">
-                <a16:creationId xmlns:a16="http://schemas.microsoft.com/office/drawing/2014/main" id="{C1AD55B2-54AB-4817-A2E6-CBD98F8769B4}"/>
+                <a16:creationId xmlns:a16="http://schemas.microsoft.com/office/drawing/2014/main" id="{1D2C1BDF-4DF4-4041-9C02-6BA78B4AF1D5}"/>
               </a:ext>
             </a:extLst>
           </p:cNvPr>
@@ -3693,7 +3716,7 @@
           <p:cNvPr id="4" name="">
             <a:extLst xmlns:a="http://schemas.openxmlformats.org/drawingml/2006/main">
               <a:ext uri="{FF2B5EF4-FFF2-40B4-BE49-F238E27FC236}">
-                <a16:creationId xmlns:a16="http://schemas.microsoft.com/office/drawing/2014/main" id="{3AB51E7A-4511-42CC-8038-83031A08106B}"/>
+                <a16:creationId xmlns:a16="http://schemas.microsoft.com/office/drawing/2014/main" id="{70977364-9CC6-46A1-A21A-FEFB3BC514DE}"/>
               </a:ext>
             </a:extLst>
           </p:cNvPr>
@@ -3750,7 +3773,7 @@
           <p:cNvPr id="5" name="">
             <a:extLst xmlns:a="http://schemas.openxmlformats.org/drawingml/2006/main">
               <a:ext uri="{FF2B5EF4-FFF2-40B4-BE49-F238E27FC236}">
-                <a16:creationId xmlns:a16="http://schemas.microsoft.com/office/drawing/2014/main" id="{C0912B0A-32EB-4C10-8309-BA48AA81BA27}"/>
+                <a16:creationId xmlns:a16="http://schemas.microsoft.com/office/drawing/2014/main" id="{91724D67-201A-4A95-9CFC-50CB44AD15A8}"/>
               </a:ext>
             </a:extLst>
           </p:cNvPr>
@@ -3805,7 +3828,7 @@
     </p:spTree>
     <p:extLst>
       <p:ext uri="{BB962C8B-B14F-4D97-AF65-F5344CB8AC3E}">
-        <p14:creationId xmlns:p14="http://schemas.microsoft.com/office/powerpoint/2010/main" val="848464831"/>
+        <p14:creationId xmlns:p14="http://schemas.microsoft.com/office/powerpoint/2010/main" val="1900678131"/>
       </p:ext>
     </p:extLst>
   </p:cSld>

--- a/4/РОП/Практики_1-8/Презентации/РОП_Практическая_3_АлбахтинИВ.pptx
+++ b/4/РОП/Практики_1-8/Презентации/РОП_Практическая_3_АлбахтинИВ.pptx
@@ -2,18 +2,18 @@
 <file path=ppt/presentation.xml><?xml version="1.0" encoding="utf-8"?>
 <p:presentation xmlns:p="http://schemas.openxmlformats.org/presentationml/2006/main">
   <p:sldMasterIdLst>
-    <p:sldMasterId xmlns:r="http://schemas.openxmlformats.org/officeDocument/2006/relationships" id="2147483648" r:id="Rc4fa738008e643a1"/>
+    <p:sldMasterId xmlns:r="http://schemas.openxmlformats.org/officeDocument/2006/relationships" id="2147483648" r:id="R588dbd6b4ad644c3"/>
   </p:sldMasterIdLst>
   <p:notesMasterIdLst>
-    <p:notesMasterId xmlns:r="http://schemas.openxmlformats.org/officeDocument/2006/relationships" r:id="Rf2789c2725bf484f"/>
+    <p:notesMasterId xmlns:r="http://schemas.openxmlformats.org/officeDocument/2006/relationships" r:id="Rb10ba013be754b8b"/>
   </p:notesMasterIdLst>
   <p:sldIdLst>
-    <p:sldId xmlns:r="http://schemas.openxmlformats.org/officeDocument/2006/relationships" id="256" r:id="R210ed315d38443ab"/>
-    <p:sldId xmlns:r="http://schemas.openxmlformats.org/officeDocument/2006/relationships" id="257" r:id="R4cda145909814dc8"/>
-    <p:sldId xmlns:r="http://schemas.openxmlformats.org/officeDocument/2006/relationships" id="258" r:id="R1da33e6693824e5c"/>
-    <p:sldId xmlns:r="http://schemas.openxmlformats.org/officeDocument/2006/relationships" id="259" r:id="R844adaadba284898"/>
-    <p:sldId xmlns:r="http://schemas.openxmlformats.org/officeDocument/2006/relationships" id="260" r:id="R185b62f5690b4baf"/>
-    <p:sldId xmlns:r="http://schemas.openxmlformats.org/officeDocument/2006/relationships" id="261" r:id="Rb90c3dc8006b4565"/>
+    <p:sldId xmlns:r="http://schemas.openxmlformats.org/officeDocument/2006/relationships" id="256" r:id="Rdf6f5d39e1174b94"/>
+    <p:sldId xmlns:r="http://schemas.openxmlformats.org/officeDocument/2006/relationships" id="257" r:id="R4cffec316949459d"/>
+    <p:sldId xmlns:r="http://schemas.openxmlformats.org/officeDocument/2006/relationships" id="258" r:id="Rcbe0654b2bb14ccc"/>
+    <p:sldId xmlns:r="http://schemas.openxmlformats.org/officeDocument/2006/relationships" id="259" r:id="Rf83ec32835d64641"/>
+    <p:sldId xmlns:r="http://schemas.openxmlformats.org/officeDocument/2006/relationships" id="260" r:id="R1cc92f727c7e439a"/>
+    <p:sldId xmlns:r="http://schemas.openxmlformats.org/officeDocument/2006/relationships" id="261" r:id="R21b6411e69c84841"/>
   </p:sldIdLst>
   <p:sldSz cx="12192000" cy="6858000"/>
   <p:notesSz cx="6858000" cy="9144000"/>
@@ -203,16 +203,16 @@
         <a:srgbClr val="96607D"/>
       </a:folHlink>
     </a:clrScheme>
-    <a:fontScheme name="Office">
+    <a:fontScheme name="">
       <a:majorFont>
-        <a:latin typeface="Calibri Light"/>
-        <a:ea typeface="Calibri Light"/>
-        <a:cs typeface="Calibri Light"/>
+        <a:latin typeface="Aptos"/>
+        <a:ea typeface=""/>
+        <a:cs typeface=""/>
       </a:majorFont>
       <a:minorFont>
-        <a:latin typeface="Calibri"/>
-        <a:ea typeface="Calibri"/>
-        <a:cs typeface="Calibri"/>
+        <a:latin typeface="Aptos"/>
+        <a:ea typeface=""/>
+        <a:cs typeface=""/>
       </a:minorFont>
     </a:fontScheme>
     <a:fmtScheme name="ChatGPT">
@@ -869,6 +869,1661 @@
       <p:grpSpPr>
         <a:xfrm xmlns:a="http://schemas.openxmlformats.org/drawingml/2006/main"/>
       </p:grpSpPr>
+      <p:sp>
+        <p:nvSpPr>
+          <p:cNvPr id="3" name="Title">
+            <a:extLst xmlns:a="http://schemas.openxmlformats.org/drawingml/2006/main">
+              <a:ext uri="{FF2B5EF4-FFF2-40B4-BE49-F238E27FC236}">
+                <a16:creationId xmlns:a16="http://schemas.microsoft.com/office/drawing/2014/main" id="{4246B29D-BF8E-4F7B-9573-94E5CF0E4C14}"/>
+              </a:ext>
+            </a:extLst>
+          </p:cNvPr>
+          <p:cNvSpPr>
+            <a:spLocks xmlns:a="http://schemas.openxmlformats.org/drawingml/2006/main" noGrp="1"/>
+          </p:cNvSpPr>
+          <p:nvPr>
+            <p:ph type="title" idx="0"/>
+          </p:nvPr>
+        </p:nvSpPr>
+        <p:spPr>
+          <a:xfrm xmlns:a="http://schemas.openxmlformats.org/drawingml/2006/main">
+            <a:off x="1219200" y="2590800"/>
+            <a:ext cx="9753600" cy="990600"/>
+          </a:xfrm>
+          <a:prstGeom xmlns:a="http://schemas.openxmlformats.org/drawingml/2006/main" prst="rect">
+            <a:avLst/>
+          </a:prstGeom>
+          <a:noFill xmlns:a="http://schemas.openxmlformats.org/drawingml/2006/main"/>
+          <a:ln xmlns:a="http://schemas.openxmlformats.org/drawingml/2006/main">
+            <a:noFill/>
+            <a:prstDash val="solid"/>
+          </a:ln>
+        </p:spPr>
+        <p:txBody>
+          <a:bodyPr xmlns:a="http://schemas.openxmlformats.org/drawingml/2006/main" wrap="square" lIns="0" tIns="0" rIns="0" bIns="0" anchor="ctr">
+            <a:normAutofit/>
+          </a:bodyPr>
+          <a:lstStyle xmlns:a="http://schemas.openxmlformats.org/drawingml/2006/main">
+            <a:defPPr algn="ctr">
+              <a:defRPr sz="4800" b="1">
+                <a:solidFill>
+                  <a:schemeClr val="tx1"/>
+                </a:solidFill>
+                <a:latin typeface="+mj-lt"/>
+                <a:ea typeface="+mj-lt"/>
+                <a:cs typeface="+mj-lt"/>
+              </a:defRPr>
+            </a:defPPr>
+            <a:lvl1pPr marL="0" indent="0">
+              <a:lnSpc>
+                <a:spcPct val="110000"/>
+              </a:lnSpc>
+              <a:spcBef>
+                <a:spcPts val="0"/>
+              </a:spcBef>
+              <a:spcAft>
+                <a:spcPts val="0"/>
+              </a:spcAft>
+              <a:buNone/>
+            </a:lvl1pPr>
+            <a:lvl2pPr marL="0" indent="0">
+              <a:lnSpc>
+                <a:spcPct val="110000"/>
+              </a:lnSpc>
+              <a:spcBef>
+                <a:spcPts val="0"/>
+              </a:spcBef>
+              <a:spcAft>
+                <a:spcPts val="0"/>
+              </a:spcAft>
+              <a:buNone/>
+            </a:lvl2pPr>
+            <a:lvl3pPr marL="0" indent="0">
+              <a:lnSpc>
+                <a:spcPct val="110000"/>
+              </a:lnSpc>
+              <a:spcBef>
+                <a:spcPts val="0"/>
+              </a:spcBef>
+              <a:spcAft>
+                <a:spcPts val="0"/>
+              </a:spcAft>
+              <a:buNone/>
+            </a:lvl3pPr>
+            <a:lvl4pPr marL="0" indent="0">
+              <a:lnSpc>
+                <a:spcPct val="110000"/>
+              </a:lnSpc>
+              <a:spcBef>
+                <a:spcPts val="0"/>
+              </a:spcBef>
+              <a:spcAft>
+                <a:spcPts val="0"/>
+              </a:spcAft>
+              <a:buNone/>
+            </a:lvl4pPr>
+            <a:lvl5pPr marL="0" indent="0">
+              <a:lnSpc>
+                <a:spcPct val="110000"/>
+              </a:lnSpc>
+              <a:spcBef>
+                <a:spcPts val="0"/>
+              </a:spcBef>
+              <a:spcAft>
+                <a:spcPts val="0"/>
+              </a:spcAft>
+              <a:buNone/>
+            </a:lvl5pPr>
+            <a:lvl6pPr marL="0" indent="0">
+              <a:lnSpc>
+                <a:spcPct val="110000"/>
+              </a:lnSpc>
+              <a:spcBef>
+                <a:spcPts val="0"/>
+              </a:spcBef>
+              <a:spcAft>
+                <a:spcPts val="0"/>
+              </a:spcAft>
+              <a:buNone/>
+            </a:lvl6pPr>
+            <a:lvl7pPr marL="0" indent="0">
+              <a:lnSpc>
+                <a:spcPct val="110000"/>
+              </a:lnSpc>
+              <a:spcBef>
+                <a:spcPts val="0"/>
+              </a:spcBef>
+              <a:spcAft>
+                <a:spcPts val="0"/>
+              </a:spcAft>
+              <a:buNone/>
+            </a:lvl7pPr>
+            <a:lvl8pPr marL="0" indent="0">
+              <a:lnSpc>
+                <a:spcPct val="110000"/>
+              </a:lnSpc>
+              <a:spcBef>
+                <a:spcPts val="0"/>
+              </a:spcBef>
+              <a:spcAft>
+                <a:spcPts val="0"/>
+              </a:spcAft>
+              <a:buNone/>
+            </a:lvl8pPr>
+            <a:lvl9pPr marL="0" indent="0">
+              <a:lnSpc>
+                <a:spcPct val="110000"/>
+              </a:lnSpc>
+              <a:spcBef>
+                <a:spcPts val="0"/>
+              </a:spcBef>
+              <a:spcAft>
+                <a:spcPts val="0"/>
+              </a:spcAft>
+              <a:buNone/>
+            </a:lvl9pPr>
+          </a:lstStyle>
+          <a:p xmlns:a="http://schemas.openxmlformats.org/drawingml/2006/main"/>
+        </p:txBody>
+      </p:sp>
+      <p:sp>
+        <p:nvSpPr>
+          <p:cNvPr id="2" name="Subtitle">
+            <a:extLst xmlns:a="http://schemas.openxmlformats.org/drawingml/2006/main">
+              <a:ext uri="{FF2B5EF4-FFF2-40B4-BE49-F238E27FC236}">
+                <a16:creationId xmlns:a16="http://schemas.microsoft.com/office/drawing/2014/main" id="{F5C6CD95-57E4-43B8-8FD6-69A0DAFE7E4F}"/>
+              </a:ext>
+            </a:extLst>
+          </p:cNvPr>
+          <p:cNvSpPr>
+            <a:spLocks xmlns:a="http://schemas.openxmlformats.org/drawingml/2006/main" noGrp="1"/>
+          </p:cNvSpPr>
+          <p:nvPr>
+            <p:ph type="subTitle" idx="1"/>
+          </p:nvPr>
+        </p:nvSpPr>
+        <p:spPr>
+          <a:xfrm xmlns:a="http://schemas.openxmlformats.org/drawingml/2006/main">
+            <a:off x="1828800" y="3771900"/>
+            <a:ext cx="8534400" cy="762000"/>
+          </a:xfrm>
+          <a:prstGeom xmlns:a="http://schemas.openxmlformats.org/drawingml/2006/main" prst="rect">
+            <a:avLst/>
+          </a:prstGeom>
+          <a:noFill xmlns:a="http://schemas.openxmlformats.org/drawingml/2006/main"/>
+          <a:ln xmlns:a="http://schemas.openxmlformats.org/drawingml/2006/main">
+            <a:noFill/>
+            <a:prstDash val="solid"/>
+          </a:ln>
+        </p:spPr>
+        <p:txBody>
+          <a:bodyPr xmlns:a="http://schemas.openxmlformats.org/drawingml/2006/main" wrap="square" lIns="0" tIns="0" rIns="0" bIns="0" anchor="ctr">
+            <a:normAutofit/>
+          </a:bodyPr>
+          <a:lstStyle xmlns:a="http://schemas.openxmlformats.org/drawingml/2006/main">
+            <a:defPPr algn="ctr">
+              <a:defRPr sz="2100" b="0">
+                <a:solidFill>
+                  <a:schemeClr val="tx1"/>
+                </a:solidFill>
+                <a:latin typeface="+mn-lt"/>
+                <a:ea typeface="+mn-lt"/>
+                <a:cs typeface="+mn-lt"/>
+              </a:defRPr>
+            </a:defPPr>
+            <a:lvl1pPr marL="0" indent="0">
+              <a:lnSpc>
+                <a:spcPct val="110000"/>
+              </a:lnSpc>
+              <a:spcBef>
+                <a:spcPts val="0"/>
+              </a:spcBef>
+              <a:spcAft>
+                <a:spcPts val="0"/>
+              </a:spcAft>
+              <a:buNone/>
+            </a:lvl1pPr>
+            <a:lvl2pPr marL="0" indent="0">
+              <a:lnSpc>
+                <a:spcPct val="110000"/>
+              </a:lnSpc>
+              <a:spcBef>
+                <a:spcPts val="0"/>
+              </a:spcBef>
+              <a:spcAft>
+                <a:spcPts val="0"/>
+              </a:spcAft>
+              <a:buNone/>
+            </a:lvl2pPr>
+            <a:lvl3pPr marL="0" indent="0">
+              <a:lnSpc>
+                <a:spcPct val="110000"/>
+              </a:lnSpc>
+              <a:spcBef>
+                <a:spcPts val="0"/>
+              </a:spcBef>
+              <a:spcAft>
+                <a:spcPts val="0"/>
+              </a:spcAft>
+              <a:buNone/>
+            </a:lvl3pPr>
+            <a:lvl4pPr marL="0" indent="0">
+              <a:lnSpc>
+                <a:spcPct val="110000"/>
+              </a:lnSpc>
+              <a:spcBef>
+                <a:spcPts val="0"/>
+              </a:spcBef>
+              <a:spcAft>
+                <a:spcPts val="0"/>
+              </a:spcAft>
+              <a:buNone/>
+            </a:lvl4pPr>
+            <a:lvl5pPr marL="0" indent="0">
+              <a:lnSpc>
+                <a:spcPct val="110000"/>
+              </a:lnSpc>
+              <a:spcBef>
+                <a:spcPts val="0"/>
+              </a:spcBef>
+              <a:spcAft>
+                <a:spcPts val="0"/>
+              </a:spcAft>
+              <a:buNone/>
+            </a:lvl5pPr>
+            <a:lvl6pPr marL="0" indent="0">
+              <a:lnSpc>
+                <a:spcPct val="110000"/>
+              </a:lnSpc>
+              <a:spcBef>
+                <a:spcPts val="0"/>
+              </a:spcBef>
+              <a:spcAft>
+                <a:spcPts val="0"/>
+              </a:spcAft>
+              <a:buNone/>
+            </a:lvl6pPr>
+            <a:lvl7pPr marL="0" indent="0">
+              <a:lnSpc>
+                <a:spcPct val="110000"/>
+              </a:lnSpc>
+              <a:spcBef>
+                <a:spcPts val="0"/>
+              </a:spcBef>
+              <a:spcAft>
+                <a:spcPts val="0"/>
+              </a:spcAft>
+              <a:buNone/>
+            </a:lvl7pPr>
+            <a:lvl8pPr marL="0" indent="0">
+              <a:lnSpc>
+                <a:spcPct val="110000"/>
+              </a:lnSpc>
+              <a:spcBef>
+                <a:spcPts val="0"/>
+              </a:spcBef>
+              <a:spcAft>
+                <a:spcPts val="0"/>
+              </a:spcAft>
+              <a:buNone/>
+            </a:lvl8pPr>
+            <a:lvl9pPr marL="0" indent="0">
+              <a:lnSpc>
+                <a:spcPct val="110000"/>
+              </a:lnSpc>
+              <a:spcBef>
+                <a:spcPts val="0"/>
+              </a:spcBef>
+              <a:spcAft>
+                <a:spcPts val="0"/>
+              </a:spcAft>
+              <a:buNone/>
+            </a:lvl9pPr>
+          </a:lstStyle>
+          <a:p xmlns:a="http://schemas.openxmlformats.org/drawingml/2006/main"/>
+        </p:txBody>
+      </p:sp>
+    </p:spTree>
+  </p:cSld>
+</p:sldLayout>
+</file>
+
+<file path=ppt/slideLayouts/slideLayout2.xml><?xml version="1.0" encoding="utf-8"?>
+<p:sldLayout xmlns:p="http://schemas.openxmlformats.org/presentationml/2006/main">
+  <p:cSld name="Section Header">
+    <p:spTree>
+      <p:nvGrpSpPr>
+        <p:cNvPr id="1" name=""/>
+        <p:cNvGrpSpPr/>
+        <p:nvPr/>
+      </p:nvGrpSpPr>
+      <p:grpSpPr>
+        <a:xfrm xmlns:a="http://schemas.openxmlformats.org/drawingml/2006/main"/>
+      </p:grpSpPr>
+      <p:sp>
+        <p:nvSpPr>
+          <p:cNvPr id="2" name="Section title">
+            <a:extLst xmlns:a="http://schemas.openxmlformats.org/drawingml/2006/main">
+              <a:ext uri="{FF2B5EF4-FFF2-40B4-BE49-F238E27FC236}">
+                <a16:creationId xmlns:a16="http://schemas.microsoft.com/office/drawing/2014/main" id="{9F2C8F3B-B39F-4843-BF21-BDDC00BEC17E}"/>
+              </a:ext>
+            </a:extLst>
+          </p:cNvPr>
+          <p:cNvSpPr>
+            <a:spLocks xmlns:a="http://schemas.openxmlformats.org/drawingml/2006/main" noGrp="1"/>
+          </p:cNvSpPr>
+          <p:nvPr>
+            <p:ph type="title" idx="0"/>
+          </p:nvPr>
+        </p:nvSpPr>
+        <p:spPr>
+          <a:xfrm xmlns:a="http://schemas.openxmlformats.org/drawingml/2006/main">
+            <a:off x="1219200" y="2857500"/>
+            <a:ext cx="9753600" cy="1143000"/>
+          </a:xfrm>
+          <a:prstGeom xmlns:a="http://schemas.openxmlformats.org/drawingml/2006/main" prst="rect">
+            <a:avLst/>
+          </a:prstGeom>
+          <a:noFill xmlns:a="http://schemas.openxmlformats.org/drawingml/2006/main"/>
+          <a:ln xmlns:a="http://schemas.openxmlformats.org/drawingml/2006/main">
+            <a:noFill/>
+            <a:prstDash val="solid"/>
+          </a:ln>
+        </p:spPr>
+        <p:txBody>
+          <a:bodyPr xmlns:a="http://schemas.openxmlformats.org/drawingml/2006/main" wrap="square" lIns="0" tIns="0" rIns="0" bIns="0" anchor="ctr">
+            <a:normAutofit/>
+          </a:bodyPr>
+          <a:lstStyle xmlns:a="http://schemas.openxmlformats.org/drawingml/2006/main">
+            <a:defPPr algn="ctr">
+              <a:defRPr sz="4200" b="1">
+                <a:solidFill>
+                  <a:schemeClr val="tx1"/>
+                </a:solidFill>
+                <a:latin typeface="+mj-lt"/>
+                <a:ea typeface="+mj-lt"/>
+                <a:cs typeface="+mj-lt"/>
+              </a:defRPr>
+            </a:defPPr>
+            <a:lvl1pPr marL="0" indent="0">
+              <a:lnSpc>
+                <a:spcPct val="110000"/>
+              </a:lnSpc>
+              <a:spcBef>
+                <a:spcPts val="0"/>
+              </a:spcBef>
+              <a:spcAft>
+                <a:spcPts val="0"/>
+              </a:spcAft>
+              <a:buNone/>
+            </a:lvl1pPr>
+            <a:lvl2pPr marL="0" indent="0">
+              <a:lnSpc>
+                <a:spcPct val="110000"/>
+              </a:lnSpc>
+              <a:spcBef>
+                <a:spcPts val="0"/>
+              </a:spcBef>
+              <a:spcAft>
+                <a:spcPts val="0"/>
+              </a:spcAft>
+              <a:buNone/>
+            </a:lvl2pPr>
+            <a:lvl3pPr marL="0" indent="0">
+              <a:lnSpc>
+                <a:spcPct val="110000"/>
+              </a:lnSpc>
+              <a:spcBef>
+                <a:spcPts val="0"/>
+              </a:spcBef>
+              <a:spcAft>
+                <a:spcPts val="0"/>
+              </a:spcAft>
+              <a:buNone/>
+            </a:lvl3pPr>
+            <a:lvl4pPr marL="0" indent="0">
+              <a:lnSpc>
+                <a:spcPct val="110000"/>
+              </a:lnSpc>
+              <a:spcBef>
+                <a:spcPts val="0"/>
+              </a:spcBef>
+              <a:spcAft>
+                <a:spcPts val="0"/>
+              </a:spcAft>
+              <a:buNone/>
+            </a:lvl4pPr>
+            <a:lvl5pPr marL="0" indent="0">
+              <a:lnSpc>
+                <a:spcPct val="110000"/>
+              </a:lnSpc>
+              <a:spcBef>
+                <a:spcPts val="0"/>
+              </a:spcBef>
+              <a:spcAft>
+                <a:spcPts val="0"/>
+              </a:spcAft>
+              <a:buNone/>
+            </a:lvl5pPr>
+            <a:lvl6pPr marL="0" indent="0">
+              <a:lnSpc>
+                <a:spcPct val="110000"/>
+              </a:lnSpc>
+              <a:spcBef>
+                <a:spcPts val="0"/>
+              </a:spcBef>
+              <a:spcAft>
+                <a:spcPts val="0"/>
+              </a:spcAft>
+              <a:buNone/>
+            </a:lvl6pPr>
+            <a:lvl7pPr marL="0" indent="0">
+              <a:lnSpc>
+                <a:spcPct val="110000"/>
+              </a:lnSpc>
+              <a:spcBef>
+                <a:spcPts val="0"/>
+              </a:spcBef>
+              <a:spcAft>
+                <a:spcPts val="0"/>
+              </a:spcAft>
+              <a:buNone/>
+            </a:lvl7pPr>
+            <a:lvl8pPr marL="0" indent="0">
+              <a:lnSpc>
+                <a:spcPct val="110000"/>
+              </a:lnSpc>
+              <a:spcBef>
+                <a:spcPts val="0"/>
+              </a:spcBef>
+              <a:spcAft>
+                <a:spcPts val="0"/>
+              </a:spcAft>
+              <a:buNone/>
+            </a:lvl8pPr>
+            <a:lvl9pPr marL="0" indent="0">
+              <a:lnSpc>
+                <a:spcPct val="110000"/>
+              </a:lnSpc>
+              <a:spcBef>
+                <a:spcPts val="0"/>
+              </a:spcBef>
+              <a:spcAft>
+                <a:spcPts val="0"/>
+              </a:spcAft>
+              <a:buNone/>
+            </a:lvl9pPr>
+          </a:lstStyle>
+          <a:p xmlns:a="http://schemas.openxmlformats.org/drawingml/2006/main"/>
+        </p:txBody>
+      </p:sp>
+    </p:spTree>
+  </p:cSld>
+</p:sldLayout>
+</file>
+
+<file path=ppt/slideLayouts/slideLayout3.xml><?xml version="1.0" encoding="utf-8"?>
+<p:sldLayout xmlns:p="http://schemas.openxmlformats.org/presentationml/2006/main">
+  <p:cSld name="Title and Body">
+    <p:spTree>
+      <p:nvGrpSpPr>
+        <p:cNvPr id="1" name=""/>
+        <p:cNvGrpSpPr/>
+        <p:nvPr/>
+      </p:nvGrpSpPr>
+      <p:grpSpPr>
+        <a:xfrm xmlns:a="http://schemas.openxmlformats.org/drawingml/2006/main"/>
+      </p:grpSpPr>
+      <p:sp>
+        <p:nvSpPr>
+          <p:cNvPr id="3" name="Title">
+            <a:extLst xmlns:a="http://schemas.openxmlformats.org/drawingml/2006/main">
+              <a:ext uri="{FF2B5EF4-FFF2-40B4-BE49-F238E27FC236}">
+                <a16:creationId xmlns:a16="http://schemas.microsoft.com/office/drawing/2014/main" id="{DAA9FBE6-51CC-42FF-B8B4-B6E59C7920D3}"/>
+              </a:ext>
+            </a:extLst>
+          </p:cNvPr>
+          <p:cNvSpPr>
+            <a:spLocks xmlns:a="http://schemas.openxmlformats.org/drawingml/2006/main" noGrp="1"/>
+          </p:cNvSpPr>
+          <p:nvPr>
+            <p:ph type="title" idx="0"/>
+          </p:nvPr>
+        </p:nvSpPr>
+        <p:spPr>
+          <a:xfrm xmlns:a="http://schemas.openxmlformats.org/drawingml/2006/main">
+            <a:off x="685800" y="533400"/>
+            <a:ext cx="10820400" cy="838200"/>
+          </a:xfrm>
+          <a:prstGeom xmlns:a="http://schemas.openxmlformats.org/drawingml/2006/main" prst="rect">
+            <a:avLst/>
+          </a:prstGeom>
+          <a:noFill xmlns:a="http://schemas.openxmlformats.org/drawingml/2006/main"/>
+          <a:ln xmlns:a="http://schemas.openxmlformats.org/drawingml/2006/main">
+            <a:noFill/>
+            <a:prstDash val="solid"/>
+          </a:ln>
+        </p:spPr>
+        <p:txBody>
+          <a:bodyPr xmlns:a="http://schemas.openxmlformats.org/drawingml/2006/main" wrap="square" lIns="0" tIns="0" rIns="0" bIns="0" anchor="t">
+            <a:normAutofit/>
+          </a:bodyPr>
+          <a:lstStyle xmlns:a="http://schemas.openxmlformats.org/drawingml/2006/main">
+            <a:defPPr algn="l">
+              <a:defRPr sz="3300" b="1">
+                <a:solidFill>
+                  <a:schemeClr val="tx1"/>
+                </a:solidFill>
+                <a:latin typeface="+mj-lt"/>
+                <a:ea typeface="+mj-lt"/>
+                <a:cs typeface="+mj-lt"/>
+              </a:defRPr>
+            </a:defPPr>
+            <a:lvl1pPr marL="0" indent="0">
+              <a:lnSpc>
+                <a:spcPct val="110000"/>
+              </a:lnSpc>
+              <a:spcBef>
+                <a:spcPts val="0"/>
+              </a:spcBef>
+              <a:spcAft>
+                <a:spcPts val="0"/>
+              </a:spcAft>
+              <a:buNone/>
+            </a:lvl1pPr>
+            <a:lvl2pPr marL="0" indent="0">
+              <a:lnSpc>
+                <a:spcPct val="110000"/>
+              </a:lnSpc>
+              <a:spcBef>
+                <a:spcPts val="0"/>
+              </a:spcBef>
+              <a:spcAft>
+                <a:spcPts val="0"/>
+              </a:spcAft>
+              <a:buNone/>
+            </a:lvl2pPr>
+            <a:lvl3pPr marL="0" indent="0">
+              <a:lnSpc>
+                <a:spcPct val="110000"/>
+              </a:lnSpc>
+              <a:spcBef>
+                <a:spcPts val="0"/>
+              </a:spcBef>
+              <a:spcAft>
+                <a:spcPts val="0"/>
+              </a:spcAft>
+              <a:buNone/>
+            </a:lvl3pPr>
+            <a:lvl4pPr marL="0" indent="0">
+              <a:lnSpc>
+                <a:spcPct val="110000"/>
+              </a:lnSpc>
+              <a:spcBef>
+                <a:spcPts val="0"/>
+              </a:spcBef>
+              <a:spcAft>
+                <a:spcPts val="0"/>
+              </a:spcAft>
+              <a:buNone/>
+            </a:lvl4pPr>
+            <a:lvl5pPr marL="0" indent="0">
+              <a:lnSpc>
+                <a:spcPct val="110000"/>
+              </a:lnSpc>
+              <a:spcBef>
+                <a:spcPts val="0"/>
+              </a:spcBef>
+              <a:spcAft>
+                <a:spcPts val="0"/>
+              </a:spcAft>
+              <a:buNone/>
+            </a:lvl5pPr>
+            <a:lvl6pPr marL="0" indent="0">
+              <a:lnSpc>
+                <a:spcPct val="110000"/>
+              </a:lnSpc>
+              <a:spcBef>
+                <a:spcPts val="0"/>
+              </a:spcBef>
+              <a:spcAft>
+                <a:spcPts val="0"/>
+              </a:spcAft>
+              <a:buNone/>
+            </a:lvl6pPr>
+            <a:lvl7pPr marL="0" indent="0">
+              <a:lnSpc>
+                <a:spcPct val="110000"/>
+              </a:lnSpc>
+              <a:spcBef>
+                <a:spcPts val="0"/>
+              </a:spcBef>
+              <a:spcAft>
+                <a:spcPts val="0"/>
+              </a:spcAft>
+              <a:buNone/>
+            </a:lvl7pPr>
+            <a:lvl8pPr marL="0" indent="0">
+              <a:lnSpc>
+                <a:spcPct val="110000"/>
+              </a:lnSpc>
+              <a:spcBef>
+                <a:spcPts val="0"/>
+              </a:spcBef>
+              <a:spcAft>
+                <a:spcPts val="0"/>
+              </a:spcAft>
+              <a:buNone/>
+            </a:lvl8pPr>
+            <a:lvl9pPr marL="0" indent="0">
+              <a:lnSpc>
+                <a:spcPct val="110000"/>
+              </a:lnSpc>
+              <a:spcBef>
+                <a:spcPts val="0"/>
+              </a:spcBef>
+              <a:spcAft>
+                <a:spcPts val="0"/>
+              </a:spcAft>
+              <a:buNone/>
+            </a:lvl9pPr>
+          </a:lstStyle>
+          <a:p xmlns:a="http://schemas.openxmlformats.org/drawingml/2006/main"/>
+        </p:txBody>
+      </p:sp>
+      <p:sp>
+        <p:nvSpPr>
+          <p:cNvPr id="2" name="Body">
+            <a:extLst xmlns:a="http://schemas.openxmlformats.org/drawingml/2006/main">
+              <a:ext uri="{FF2B5EF4-FFF2-40B4-BE49-F238E27FC236}">
+                <a16:creationId xmlns:a16="http://schemas.microsoft.com/office/drawing/2014/main" id="{F0EA4293-3EB8-46AE-81AA-FF4CF8B9B92D}"/>
+              </a:ext>
+            </a:extLst>
+          </p:cNvPr>
+          <p:cNvSpPr>
+            <a:spLocks xmlns:a="http://schemas.openxmlformats.org/drawingml/2006/main" noGrp="1"/>
+          </p:cNvSpPr>
+          <p:nvPr>
+            <p:ph type="body" idx="1"/>
+          </p:nvPr>
+        </p:nvSpPr>
+        <p:spPr>
+          <a:xfrm xmlns:a="http://schemas.openxmlformats.org/drawingml/2006/main">
+            <a:off x="685800" y="1905000"/>
+            <a:ext cx="10820400" cy="4267200"/>
+          </a:xfrm>
+          <a:prstGeom xmlns:a="http://schemas.openxmlformats.org/drawingml/2006/main" prst="rect">
+            <a:avLst/>
+          </a:prstGeom>
+          <a:noFill xmlns:a="http://schemas.openxmlformats.org/drawingml/2006/main"/>
+          <a:ln xmlns:a="http://schemas.openxmlformats.org/drawingml/2006/main">
+            <a:noFill/>
+            <a:prstDash val="solid"/>
+          </a:ln>
+        </p:spPr>
+        <p:txBody>
+          <a:bodyPr xmlns:a="http://schemas.openxmlformats.org/drawingml/2006/main" wrap="square" lIns="0" tIns="0" rIns="0" bIns="0" anchor="t">
+            <a:normAutofit/>
+          </a:bodyPr>
+          <a:lstStyle xmlns:a="http://schemas.openxmlformats.org/drawingml/2006/main">
+            <a:defPPr algn="l">
+              <a:defRPr sz="2250" b="0">
+                <a:solidFill>
+                  <a:schemeClr val="tx1"/>
+                </a:solidFill>
+                <a:latin typeface="+mn-lt"/>
+                <a:ea typeface="+mn-lt"/>
+                <a:cs typeface="+mn-lt"/>
+              </a:defRPr>
+            </a:defPPr>
+            <a:lvl1pPr marL="228600" indent="-228600">
+              <a:lnSpc>
+                <a:spcPct val="110000"/>
+              </a:lnSpc>
+              <a:spcBef>
+                <a:spcPts val="0"/>
+              </a:spcBef>
+              <a:spcAft>
+                <a:spcPts val="1200"/>
+              </a:spcAft>
+              <a:buChar char="•"/>
+            </a:lvl1pPr>
+            <a:lvl2pPr marL="533400" indent="-228600">
+              <a:lnSpc>
+                <a:spcPct val="110000"/>
+              </a:lnSpc>
+              <a:spcBef>
+                <a:spcPts val="0"/>
+              </a:spcBef>
+              <a:spcAft>
+                <a:spcPts val="1200"/>
+              </a:spcAft>
+              <a:buChar char="•"/>
+            </a:lvl2pPr>
+            <a:lvl3pPr marL="838200" indent="-228600">
+              <a:lnSpc>
+                <a:spcPct val="110000"/>
+              </a:lnSpc>
+              <a:spcBef>
+                <a:spcPts val="0"/>
+              </a:spcBef>
+              <a:spcAft>
+                <a:spcPts val="1200"/>
+              </a:spcAft>
+              <a:buChar char="•"/>
+            </a:lvl3pPr>
+            <a:lvl4pPr marL="1143000" indent="-228600">
+              <a:lnSpc>
+                <a:spcPct val="110000"/>
+              </a:lnSpc>
+              <a:spcBef>
+                <a:spcPts val="0"/>
+              </a:spcBef>
+              <a:spcAft>
+                <a:spcPts val="1200"/>
+              </a:spcAft>
+              <a:buChar char="•"/>
+            </a:lvl4pPr>
+            <a:lvl5pPr marL="1447800" indent="-228600">
+              <a:lnSpc>
+                <a:spcPct val="110000"/>
+              </a:lnSpc>
+              <a:spcBef>
+                <a:spcPts val="0"/>
+              </a:spcBef>
+              <a:spcAft>
+                <a:spcPts val="1200"/>
+              </a:spcAft>
+              <a:buChar char="•"/>
+            </a:lvl5pPr>
+            <a:lvl6pPr marL="1752600" indent="-228600">
+              <a:lnSpc>
+                <a:spcPct val="110000"/>
+              </a:lnSpc>
+              <a:spcBef>
+                <a:spcPts val="0"/>
+              </a:spcBef>
+              <a:spcAft>
+                <a:spcPts val="1200"/>
+              </a:spcAft>
+              <a:buChar char="•"/>
+            </a:lvl6pPr>
+            <a:lvl7pPr marL="2057400" indent="-228600">
+              <a:lnSpc>
+                <a:spcPct val="110000"/>
+              </a:lnSpc>
+              <a:spcBef>
+                <a:spcPts val="0"/>
+              </a:spcBef>
+              <a:spcAft>
+                <a:spcPts val="1200"/>
+              </a:spcAft>
+              <a:buChar char="•"/>
+            </a:lvl7pPr>
+            <a:lvl8pPr marL="2362200" indent="-228600">
+              <a:lnSpc>
+                <a:spcPct val="110000"/>
+              </a:lnSpc>
+              <a:spcBef>
+                <a:spcPts val="0"/>
+              </a:spcBef>
+              <a:spcAft>
+                <a:spcPts val="1200"/>
+              </a:spcAft>
+              <a:buChar char="•"/>
+            </a:lvl8pPr>
+            <a:lvl9pPr marL="2667000" indent="-228600">
+              <a:lnSpc>
+                <a:spcPct val="110000"/>
+              </a:lnSpc>
+              <a:spcBef>
+                <a:spcPts val="0"/>
+              </a:spcBef>
+              <a:spcAft>
+                <a:spcPts val="1200"/>
+              </a:spcAft>
+              <a:buChar char="•"/>
+            </a:lvl9pPr>
+          </a:lstStyle>
+          <a:p xmlns:a="http://schemas.openxmlformats.org/drawingml/2006/main"/>
+        </p:txBody>
+      </p:sp>
+    </p:spTree>
+  </p:cSld>
+</p:sldLayout>
+</file>
+
+<file path=ppt/slideLayouts/slideLayout4.xml><?xml version="1.0" encoding="utf-8"?>
+<p:sldLayout xmlns:p="http://schemas.openxmlformats.org/presentationml/2006/main">
+  <p:cSld name="Title and Two Column">
+    <p:spTree>
+      <p:nvGrpSpPr>
+        <p:cNvPr id="1" name=""/>
+        <p:cNvGrpSpPr/>
+        <p:nvPr/>
+      </p:nvGrpSpPr>
+      <p:grpSpPr>
+        <a:xfrm xmlns:a="http://schemas.openxmlformats.org/drawingml/2006/main"/>
+      </p:grpSpPr>
+      <p:sp>
+        <p:nvSpPr>
+          <p:cNvPr id="4" name="Title">
+            <a:extLst xmlns:a="http://schemas.openxmlformats.org/drawingml/2006/main">
+              <a:ext uri="{FF2B5EF4-FFF2-40B4-BE49-F238E27FC236}">
+                <a16:creationId xmlns:a16="http://schemas.microsoft.com/office/drawing/2014/main" id="{5F5D93CF-B460-4F1E-9418-99C3FA5E003F}"/>
+              </a:ext>
+            </a:extLst>
+          </p:cNvPr>
+          <p:cNvSpPr>
+            <a:spLocks xmlns:a="http://schemas.openxmlformats.org/drawingml/2006/main" noGrp="1"/>
+          </p:cNvSpPr>
+          <p:nvPr>
+            <p:ph type="title" idx="0"/>
+          </p:nvPr>
+        </p:nvSpPr>
+        <p:spPr>
+          <a:xfrm xmlns:a="http://schemas.openxmlformats.org/drawingml/2006/main">
+            <a:off x="685800" y="533400"/>
+            <a:ext cx="10820400" cy="838200"/>
+          </a:xfrm>
+          <a:prstGeom xmlns:a="http://schemas.openxmlformats.org/drawingml/2006/main" prst="rect">
+            <a:avLst/>
+          </a:prstGeom>
+          <a:noFill xmlns:a="http://schemas.openxmlformats.org/drawingml/2006/main"/>
+          <a:ln xmlns:a="http://schemas.openxmlformats.org/drawingml/2006/main">
+            <a:noFill/>
+            <a:prstDash val="solid"/>
+          </a:ln>
+        </p:spPr>
+        <p:txBody>
+          <a:bodyPr xmlns:a="http://schemas.openxmlformats.org/drawingml/2006/main" wrap="square" lIns="0" tIns="0" rIns="0" bIns="0" anchor="t">
+            <a:normAutofit/>
+          </a:bodyPr>
+          <a:lstStyle xmlns:a="http://schemas.openxmlformats.org/drawingml/2006/main">
+            <a:defPPr algn="l">
+              <a:defRPr sz="3300" b="1">
+                <a:solidFill>
+                  <a:schemeClr val="tx1"/>
+                </a:solidFill>
+                <a:latin typeface="+mj-lt"/>
+                <a:ea typeface="+mj-lt"/>
+                <a:cs typeface="+mj-lt"/>
+              </a:defRPr>
+            </a:defPPr>
+            <a:lvl1pPr marL="0" indent="0">
+              <a:lnSpc>
+                <a:spcPct val="110000"/>
+              </a:lnSpc>
+              <a:spcBef>
+                <a:spcPts val="0"/>
+              </a:spcBef>
+              <a:spcAft>
+                <a:spcPts val="0"/>
+              </a:spcAft>
+              <a:buNone/>
+            </a:lvl1pPr>
+            <a:lvl2pPr marL="0" indent="0">
+              <a:lnSpc>
+                <a:spcPct val="110000"/>
+              </a:lnSpc>
+              <a:spcBef>
+                <a:spcPts val="0"/>
+              </a:spcBef>
+              <a:spcAft>
+                <a:spcPts val="0"/>
+              </a:spcAft>
+              <a:buNone/>
+            </a:lvl2pPr>
+            <a:lvl3pPr marL="0" indent="0">
+              <a:lnSpc>
+                <a:spcPct val="110000"/>
+              </a:lnSpc>
+              <a:spcBef>
+                <a:spcPts val="0"/>
+              </a:spcBef>
+              <a:spcAft>
+                <a:spcPts val="0"/>
+              </a:spcAft>
+              <a:buNone/>
+            </a:lvl3pPr>
+            <a:lvl4pPr marL="0" indent="0">
+              <a:lnSpc>
+                <a:spcPct val="110000"/>
+              </a:lnSpc>
+              <a:spcBef>
+                <a:spcPts val="0"/>
+              </a:spcBef>
+              <a:spcAft>
+                <a:spcPts val="0"/>
+              </a:spcAft>
+              <a:buNone/>
+            </a:lvl4pPr>
+            <a:lvl5pPr marL="0" indent="0">
+              <a:lnSpc>
+                <a:spcPct val="110000"/>
+              </a:lnSpc>
+              <a:spcBef>
+                <a:spcPts val="0"/>
+              </a:spcBef>
+              <a:spcAft>
+                <a:spcPts val="0"/>
+              </a:spcAft>
+              <a:buNone/>
+            </a:lvl5pPr>
+            <a:lvl6pPr marL="0" indent="0">
+              <a:lnSpc>
+                <a:spcPct val="110000"/>
+              </a:lnSpc>
+              <a:spcBef>
+                <a:spcPts val="0"/>
+              </a:spcBef>
+              <a:spcAft>
+                <a:spcPts val="0"/>
+              </a:spcAft>
+              <a:buNone/>
+            </a:lvl6pPr>
+            <a:lvl7pPr marL="0" indent="0">
+              <a:lnSpc>
+                <a:spcPct val="110000"/>
+              </a:lnSpc>
+              <a:spcBef>
+                <a:spcPts val="0"/>
+              </a:spcBef>
+              <a:spcAft>
+                <a:spcPts val="0"/>
+              </a:spcAft>
+              <a:buNone/>
+            </a:lvl7pPr>
+            <a:lvl8pPr marL="0" indent="0">
+              <a:lnSpc>
+                <a:spcPct val="110000"/>
+              </a:lnSpc>
+              <a:spcBef>
+                <a:spcPts val="0"/>
+              </a:spcBef>
+              <a:spcAft>
+                <a:spcPts val="0"/>
+              </a:spcAft>
+              <a:buNone/>
+            </a:lvl8pPr>
+            <a:lvl9pPr marL="0" indent="0">
+              <a:lnSpc>
+                <a:spcPct val="110000"/>
+              </a:lnSpc>
+              <a:spcBef>
+                <a:spcPts val="0"/>
+              </a:spcBef>
+              <a:spcAft>
+                <a:spcPts val="0"/>
+              </a:spcAft>
+              <a:buNone/>
+            </a:lvl9pPr>
+          </a:lstStyle>
+          <a:p xmlns:a="http://schemas.openxmlformats.org/drawingml/2006/main"/>
+        </p:txBody>
+      </p:sp>
+      <p:sp>
+        <p:nvSpPr>
+          <p:cNvPr id="2" name="Left column">
+            <a:extLst xmlns:a="http://schemas.openxmlformats.org/drawingml/2006/main">
+              <a:ext uri="{FF2B5EF4-FFF2-40B4-BE49-F238E27FC236}">
+                <a16:creationId xmlns:a16="http://schemas.microsoft.com/office/drawing/2014/main" id="{C2174BFC-528E-44A2-B295-D69476BCEF25}"/>
+              </a:ext>
+            </a:extLst>
+          </p:cNvPr>
+          <p:cNvSpPr>
+            <a:spLocks xmlns:a="http://schemas.openxmlformats.org/drawingml/2006/main" noGrp="1"/>
+          </p:cNvSpPr>
+          <p:nvPr>
+            <p:ph type="body" idx="1"/>
+          </p:nvPr>
+        </p:nvSpPr>
+        <p:spPr>
+          <a:xfrm xmlns:a="http://schemas.openxmlformats.org/drawingml/2006/main">
+            <a:off x="685800" y="1905000"/>
+            <a:ext cx="5029200" cy="4267200"/>
+          </a:xfrm>
+          <a:prstGeom xmlns:a="http://schemas.openxmlformats.org/drawingml/2006/main" prst="rect">
+            <a:avLst/>
+          </a:prstGeom>
+          <a:noFill xmlns:a="http://schemas.openxmlformats.org/drawingml/2006/main"/>
+          <a:ln xmlns:a="http://schemas.openxmlformats.org/drawingml/2006/main">
+            <a:noFill/>
+            <a:prstDash val="solid"/>
+          </a:ln>
+        </p:spPr>
+        <p:txBody>
+          <a:bodyPr xmlns:a="http://schemas.openxmlformats.org/drawingml/2006/main" wrap="square" lIns="0" tIns="0" rIns="0" bIns="0" anchor="t">
+            <a:normAutofit/>
+          </a:bodyPr>
+          <a:lstStyle xmlns:a="http://schemas.openxmlformats.org/drawingml/2006/main">
+            <a:defPPr algn="l">
+              <a:defRPr sz="2100" b="0">
+                <a:solidFill>
+                  <a:schemeClr val="tx1"/>
+                </a:solidFill>
+                <a:latin typeface="+mn-lt"/>
+                <a:ea typeface="+mn-lt"/>
+                <a:cs typeface="+mn-lt"/>
+              </a:defRPr>
+            </a:defPPr>
+            <a:lvl1pPr marL="228600" indent="-228600">
+              <a:lnSpc>
+                <a:spcPct val="110000"/>
+              </a:lnSpc>
+              <a:spcBef>
+                <a:spcPts val="0"/>
+              </a:spcBef>
+              <a:spcAft>
+                <a:spcPts val="1200"/>
+              </a:spcAft>
+              <a:buChar char="•"/>
+            </a:lvl1pPr>
+            <a:lvl2pPr marL="533400" indent="-228600">
+              <a:lnSpc>
+                <a:spcPct val="110000"/>
+              </a:lnSpc>
+              <a:spcBef>
+                <a:spcPts val="0"/>
+              </a:spcBef>
+              <a:spcAft>
+                <a:spcPts val="1200"/>
+              </a:spcAft>
+              <a:buChar char="•"/>
+            </a:lvl2pPr>
+            <a:lvl3pPr marL="838200" indent="-228600">
+              <a:lnSpc>
+                <a:spcPct val="110000"/>
+              </a:lnSpc>
+              <a:spcBef>
+                <a:spcPts val="0"/>
+              </a:spcBef>
+              <a:spcAft>
+                <a:spcPts val="1200"/>
+              </a:spcAft>
+              <a:buChar char="•"/>
+            </a:lvl3pPr>
+            <a:lvl4pPr marL="1143000" indent="-228600">
+              <a:lnSpc>
+                <a:spcPct val="110000"/>
+              </a:lnSpc>
+              <a:spcBef>
+                <a:spcPts val="0"/>
+              </a:spcBef>
+              <a:spcAft>
+                <a:spcPts val="1200"/>
+              </a:spcAft>
+              <a:buChar char="•"/>
+            </a:lvl4pPr>
+            <a:lvl5pPr marL="1447800" indent="-228600">
+              <a:lnSpc>
+                <a:spcPct val="110000"/>
+              </a:lnSpc>
+              <a:spcBef>
+                <a:spcPts val="0"/>
+              </a:spcBef>
+              <a:spcAft>
+                <a:spcPts val="1200"/>
+              </a:spcAft>
+              <a:buChar char="•"/>
+            </a:lvl5pPr>
+            <a:lvl6pPr marL="1752600" indent="-228600">
+              <a:lnSpc>
+                <a:spcPct val="110000"/>
+              </a:lnSpc>
+              <a:spcBef>
+                <a:spcPts val="0"/>
+              </a:spcBef>
+              <a:spcAft>
+                <a:spcPts val="1200"/>
+              </a:spcAft>
+              <a:buChar char="•"/>
+            </a:lvl6pPr>
+            <a:lvl7pPr marL="2057400" indent="-228600">
+              <a:lnSpc>
+                <a:spcPct val="110000"/>
+              </a:lnSpc>
+              <a:spcBef>
+                <a:spcPts val="0"/>
+              </a:spcBef>
+              <a:spcAft>
+                <a:spcPts val="1200"/>
+              </a:spcAft>
+              <a:buChar char="•"/>
+            </a:lvl7pPr>
+            <a:lvl8pPr marL="2362200" indent="-228600">
+              <a:lnSpc>
+                <a:spcPct val="110000"/>
+              </a:lnSpc>
+              <a:spcBef>
+                <a:spcPts val="0"/>
+              </a:spcBef>
+              <a:spcAft>
+                <a:spcPts val="1200"/>
+              </a:spcAft>
+              <a:buChar char="•"/>
+            </a:lvl8pPr>
+            <a:lvl9pPr marL="2667000" indent="-228600">
+              <a:lnSpc>
+                <a:spcPct val="110000"/>
+              </a:lnSpc>
+              <a:spcBef>
+                <a:spcPts val="0"/>
+              </a:spcBef>
+              <a:spcAft>
+                <a:spcPts val="1200"/>
+              </a:spcAft>
+              <a:buChar char="•"/>
+            </a:lvl9pPr>
+          </a:lstStyle>
+          <a:p xmlns:a="http://schemas.openxmlformats.org/drawingml/2006/main"/>
+        </p:txBody>
+      </p:sp>
+      <p:sp>
+        <p:nvSpPr>
+          <p:cNvPr id="3" name="Right column">
+            <a:extLst xmlns:a="http://schemas.openxmlformats.org/drawingml/2006/main">
+              <a:ext uri="{FF2B5EF4-FFF2-40B4-BE49-F238E27FC236}">
+                <a16:creationId xmlns:a16="http://schemas.microsoft.com/office/drawing/2014/main" id="{001BB523-A129-49F8-A85A-818E776F790A}"/>
+              </a:ext>
+            </a:extLst>
+          </p:cNvPr>
+          <p:cNvSpPr>
+            <a:spLocks xmlns:a="http://schemas.openxmlformats.org/drawingml/2006/main" noGrp="1"/>
+          </p:cNvSpPr>
+          <p:nvPr>
+            <p:ph type="body" idx="2"/>
+          </p:nvPr>
+        </p:nvSpPr>
+        <p:spPr>
+          <a:xfrm xmlns:a="http://schemas.openxmlformats.org/drawingml/2006/main">
+            <a:off x="6477000" y="1905000"/>
+            <a:ext cx="5029200" cy="4267200"/>
+          </a:xfrm>
+          <a:prstGeom xmlns:a="http://schemas.openxmlformats.org/drawingml/2006/main" prst="rect">
+            <a:avLst/>
+          </a:prstGeom>
+          <a:noFill xmlns:a="http://schemas.openxmlformats.org/drawingml/2006/main"/>
+          <a:ln xmlns:a="http://schemas.openxmlformats.org/drawingml/2006/main">
+            <a:noFill/>
+            <a:prstDash val="solid"/>
+          </a:ln>
+        </p:spPr>
+        <p:txBody>
+          <a:bodyPr xmlns:a="http://schemas.openxmlformats.org/drawingml/2006/main" wrap="square" lIns="0" tIns="0" rIns="0" bIns="0" anchor="t">
+            <a:normAutofit/>
+          </a:bodyPr>
+          <a:lstStyle xmlns:a="http://schemas.openxmlformats.org/drawingml/2006/main">
+            <a:defPPr algn="l">
+              <a:defRPr sz="2100" b="0">
+                <a:solidFill>
+                  <a:schemeClr val="tx1"/>
+                </a:solidFill>
+                <a:latin typeface="+mn-lt"/>
+                <a:ea typeface="+mn-lt"/>
+                <a:cs typeface="+mn-lt"/>
+              </a:defRPr>
+            </a:defPPr>
+            <a:lvl1pPr marL="228600" indent="-228600">
+              <a:lnSpc>
+                <a:spcPct val="110000"/>
+              </a:lnSpc>
+              <a:spcBef>
+                <a:spcPts val="0"/>
+              </a:spcBef>
+              <a:spcAft>
+                <a:spcPts val="1200"/>
+              </a:spcAft>
+              <a:buChar char="•"/>
+            </a:lvl1pPr>
+            <a:lvl2pPr marL="533400" indent="-228600">
+              <a:lnSpc>
+                <a:spcPct val="110000"/>
+              </a:lnSpc>
+              <a:spcBef>
+                <a:spcPts val="0"/>
+              </a:spcBef>
+              <a:spcAft>
+                <a:spcPts val="1200"/>
+              </a:spcAft>
+              <a:buChar char="•"/>
+            </a:lvl2pPr>
+            <a:lvl3pPr marL="838200" indent="-228600">
+              <a:lnSpc>
+                <a:spcPct val="110000"/>
+              </a:lnSpc>
+              <a:spcBef>
+                <a:spcPts val="0"/>
+              </a:spcBef>
+              <a:spcAft>
+                <a:spcPts val="1200"/>
+              </a:spcAft>
+              <a:buChar char="•"/>
+            </a:lvl3pPr>
+            <a:lvl4pPr marL="1143000" indent="-228600">
+              <a:lnSpc>
+                <a:spcPct val="110000"/>
+              </a:lnSpc>
+              <a:spcBef>
+                <a:spcPts val="0"/>
+              </a:spcBef>
+              <a:spcAft>
+                <a:spcPts val="1200"/>
+              </a:spcAft>
+              <a:buChar char="•"/>
+            </a:lvl4pPr>
+            <a:lvl5pPr marL="1447800" indent="-228600">
+              <a:lnSpc>
+                <a:spcPct val="110000"/>
+              </a:lnSpc>
+              <a:spcBef>
+                <a:spcPts val="0"/>
+              </a:spcBef>
+              <a:spcAft>
+                <a:spcPts val="1200"/>
+              </a:spcAft>
+              <a:buChar char="•"/>
+            </a:lvl5pPr>
+            <a:lvl6pPr marL="1752600" indent="-228600">
+              <a:lnSpc>
+                <a:spcPct val="110000"/>
+              </a:lnSpc>
+              <a:spcBef>
+                <a:spcPts val="0"/>
+              </a:spcBef>
+              <a:spcAft>
+                <a:spcPts val="1200"/>
+              </a:spcAft>
+              <a:buChar char="•"/>
+            </a:lvl6pPr>
+            <a:lvl7pPr marL="2057400" indent="-228600">
+              <a:lnSpc>
+                <a:spcPct val="110000"/>
+              </a:lnSpc>
+              <a:spcBef>
+                <a:spcPts val="0"/>
+              </a:spcBef>
+              <a:spcAft>
+                <a:spcPts val="1200"/>
+              </a:spcAft>
+              <a:buChar char="•"/>
+            </a:lvl7pPr>
+            <a:lvl8pPr marL="2362200" indent="-228600">
+              <a:lnSpc>
+                <a:spcPct val="110000"/>
+              </a:lnSpc>
+              <a:spcBef>
+                <a:spcPts val="0"/>
+              </a:spcBef>
+              <a:spcAft>
+                <a:spcPts val="1200"/>
+              </a:spcAft>
+              <a:buChar char="•"/>
+            </a:lvl8pPr>
+            <a:lvl9pPr marL="2667000" indent="-228600">
+              <a:lnSpc>
+                <a:spcPct val="110000"/>
+              </a:lnSpc>
+              <a:spcBef>
+                <a:spcPts val="0"/>
+              </a:spcBef>
+              <a:spcAft>
+                <a:spcPts val="1200"/>
+              </a:spcAft>
+              <a:buChar char="•"/>
+            </a:lvl9pPr>
+          </a:lstStyle>
+          <a:p xmlns:a="http://schemas.openxmlformats.org/drawingml/2006/main"/>
+        </p:txBody>
+      </p:sp>
+    </p:spTree>
+  </p:cSld>
+</p:sldLayout>
+</file>
+
+<file path=ppt/slideLayouts/slideLayout5.xml><?xml version="1.0" encoding="utf-8"?>
+<p:sldLayout xmlns:p="http://schemas.openxmlformats.org/presentationml/2006/main">
+  <p:cSld name="Title and One Column">
+    <p:spTree>
+      <p:nvGrpSpPr>
+        <p:cNvPr id="1" name=""/>
+        <p:cNvGrpSpPr/>
+        <p:nvPr/>
+      </p:nvGrpSpPr>
+      <p:grpSpPr>
+        <a:xfrm xmlns:a="http://schemas.openxmlformats.org/drawingml/2006/main"/>
+      </p:grpSpPr>
+      <p:sp>
+        <p:nvSpPr>
+          <p:cNvPr id="3" name="Title">
+            <a:extLst xmlns:a="http://schemas.openxmlformats.org/drawingml/2006/main">
+              <a:ext uri="{FF2B5EF4-FFF2-40B4-BE49-F238E27FC236}">
+                <a16:creationId xmlns:a16="http://schemas.microsoft.com/office/drawing/2014/main" id="{D2F94DE6-A43B-4D8A-87B7-503738CA20FB}"/>
+              </a:ext>
+            </a:extLst>
+          </p:cNvPr>
+          <p:cNvSpPr>
+            <a:spLocks xmlns:a="http://schemas.openxmlformats.org/drawingml/2006/main" noGrp="1"/>
+          </p:cNvSpPr>
+          <p:nvPr>
+            <p:ph type="title" idx="0"/>
+          </p:nvPr>
+        </p:nvSpPr>
+        <p:spPr>
+          <a:xfrm xmlns:a="http://schemas.openxmlformats.org/drawingml/2006/main">
+            <a:off x="685800" y="533400"/>
+            <a:ext cx="10820400" cy="838200"/>
+          </a:xfrm>
+          <a:prstGeom xmlns:a="http://schemas.openxmlformats.org/drawingml/2006/main" prst="rect">
+            <a:avLst/>
+          </a:prstGeom>
+          <a:noFill xmlns:a="http://schemas.openxmlformats.org/drawingml/2006/main"/>
+          <a:ln xmlns:a="http://schemas.openxmlformats.org/drawingml/2006/main">
+            <a:noFill/>
+            <a:prstDash val="solid"/>
+          </a:ln>
+        </p:spPr>
+        <p:txBody>
+          <a:bodyPr xmlns:a="http://schemas.openxmlformats.org/drawingml/2006/main" wrap="square" lIns="0" tIns="0" rIns="0" bIns="0" anchor="t">
+            <a:normAutofit/>
+          </a:bodyPr>
+          <a:lstStyle xmlns:a="http://schemas.openxmlformats.org/drawingml/2006/main">
+            <a:defPPr algn="l">
+              <a:defRPr sz="3300" b="1">
+                <a:solidFill>
+                  <a:schemeClr val="tx1"/>
+                </a:solidFill>
+                <a:latin typeface="+mj-lt"/>
+                <a:ea typeface="+mj-lt"/>
+                <a:cs typeface="+mj-lt"/>
+              </a:defRPr>
+            </a:defPPr>
+            <a:lvl1pPr marL="0" indent="0">
+              <a:lnSpc>
+                <a:spcPct val="110000"/>
+              </a:lnSpc>
+              <a:spcBef>
+                <a:spcPts val="0"/>
+              </a:spcBef>
+              <a:spcAft>
+                <a:spcPts val="0"/>
+              </a:spcAft>
+              <a:buNone/>
+            </a:lvl1pPr>
+            <a:lvl2pPr marL="0" indent="0">
+              <a:lnSpc>
+                <a:spcPct val="110000"/>
+              </a:lnSpc>
+              <a:spcBef>
+                <a:spcPts val="0"/>
+              </a:spcBef>
+              <a:spcAft>
+                <a:spcPts val="0"/>
+              </a:spcAft>
+              <a:buNone/>
+            </a:lvl2pPr>
+            <a:lvl3pPr marL="0" indent="0">
+              <a:lnSpc>
+                <a:spcPct val="110000"/>
+              </a:lnSpc>
+              <a:spcBef>
+                <a:spcPts val="0"/>
+              </a:spcBef>
+              <a:spcAft>
+                <a:spcPts val="0"/>
+              </a:spcAft>
+              <a:buNone/>
+            </a:lvl3pPr>
+            <a:lvl4pPr marL="0" indent="0">
+              <a:lnSpc>
+                <a:spcPct val="110000"/>
+              </a:lnSpc>
+              <a:spcBef>
+                <a:spcPts val="0"/>
+              </a:spcBef>
+              <a:spcAft>
+                <a:spcPts val="0"/>
+              </a:spcAft>
+              <a:buNone/>
+            </a:lvl4pPr>
+            <a:lvl5pPr marL="0" indent="0">
+              <a:lnSpc>
+                <a:spcPct val="110000"/>
+              </a:lnSpc>
+              <a:spcBef>
+                <a:spcPts val="0"/>
+              </a:spcBef>
+              <a:spcAft>
+                <a:spcPts val="0"/>
+              </a:spcAft>
+              <a:buNone/>
+            </a:lvl5pPr>
+            <a:lvl6pPr marL="0" indent="0">
+              <a:lnSpc>
+                <a:spcPct val="110000"/>
+              </a:lnSpc>
+              <a:spcBef>
+                <a:spcPts val="0"/>
+              </a:spcBef>
+              <a:spcAft>
+                <a:spcPts val="0"/>
+              </a:spcAft>
+              <a:buNone/>
+            </a:lvl6pPr>
+            <a:lvl7pPr marL="0" indent="0">
+              <a:lnSpc>
+                <a:spcPct val="110000"/>
+              </a:lnSpc>
+              <a:spcBef>
+                <a:spcPts val="0"/>
+              </a:spcBef>
+              <a:spcAft>
+                <a:spcPts val="0"/>
+              </a:spcAft>
+              <a:buNone/>
+            </a:lvl7pPr>
+            <a:lvl8pPr marL="0" indent="0">
+              <a:lnSpc>
+                <a:spcPct val="110000"/>
+              </a:lnSpc>
+              <a:spcBef>
+                <a:spcPts val="0"/>
+              </a:spcBef>
+              <a:spcAft>
+                <a:spcPts val="0"/>
+              </a:spcAft>
+              <a:buNone/>
+            </a:lvl8pPr>
+            <a:lvl9pPr marL="0" indent="0">
+              <a:lnSpc>
+                <a:spcPct val="110000"/>
+              </a:lnSpc>
+              <a:spcBef>
+                <a:spcPts val="0"/>
+              </a:spcBef>
+              <a:spcAft>
+                <a:spcPts val="0"/>
+              </a:spcAft>
+              <a:buNone/>
+            </a:lvl9pPr>
+          </a:lstStyle>
+          <a:p xmlns:a="http://schemas.openxmlformats.org/drawingml/2006/main"/>
+        </p:txBody>
+      </p:sp>
+      <p:sp>
+        <p:nvSpPr>
+          <p:cNvPr id="2" name="Left column">
+            <a:extLst xmlns:a="http://schemas.openxmlformats.org/drawingml/2006/main">
+              <a:ext uri="{FF2B5EF4-FFF2-40B4-BE49-F238E27FC236}">
+                <a16:creationId xmlns:a16="http://schemas.microsoft.com/office/drawing/2014/main" id="{CDC91158-D80D-42AC-945D-352FBE807C54}"/>
+              </a:ext>
+            </a:extLst>
+          </p:cNvPr>
+          <p:cNvSpPr>
+            <a:spLocks xmlns:a="http://schemas.openxmlformats.org/drawingml/2006/main" noGrp="1"/>
+          </p:cNvSpPr>
+          <p:nvPr>
+            <p:ph type="body" idx="1"/>
+          </p:nvPr>
+        </p:nvSpPr>
+        <p:spPr>
+          <a:xfrm xmlns:a="http://schemas.openxmlformats.org/drawingml/2006/main">
+            <a:off x="685800" y="1905000"/>
+            <a:ext cx="5029200" cy="4267200"/>
+          </a:xfrm>
+          <a:prstGeom xmlns:a="http://schemas.openxmlformats.org/drawingml/2006/main" prst="rect">
+            <a:avLst/>
+          </a:prstGeom>
+          <a:noFill xmlns:a="http://schemas.openxmlformats.org/drawingml/2006/main"/>
+          <a:ln xmlns:a="http://schemas.openxmlformats.org/drawingml/2006/main">
+            <a:noFill/>
+            <a:prstDash val="solid"/>
+          </a:ln>
+        </p:spPr>
+        <p:txBody>
+          <a:bodyPr xmlns:a="http://schemas.openxmlformats.org/drawingml/2006/main" wrap="square" lIns="0" tIns="0" rIns="0" bIns="0" anchor="t">
+            <a:normAutofit/>
+          </a:bodyPr>
+          <a:lstStyle xmlns:a="http://schemas.openxmlformats.org/drawingml/2006/main">
+            <a:defPPr algn="l">
+              <a:defRPr sz="2250" b="0">
+                <a:solidFill>
+                  <a:schemeClr val="tx1"/>
+                </a:solidFill>
+                <a:latin typeface="+mn-lt"/>
+                <a:ea typeface="+mn-lt"/>
+                <a:cs typeface="+mn-lt"/>
+              </a:defRPr>
+            </a:defPPr>
+            <a:lvl1pPr marL="228600" indent="-228600">
+              <a:lnSpc>
+                <a:spcPct val="110000"/>
+              </a:lnSpc>
+              <a:spcBef>
+                <a:spcPts val="0"/>
+              </a:spcBef>
+              <a:spcAft>
+                <a:spcPts val="1200"/>
+              </a:spcAft>
+              <a:buChar char="•"/>
+            </a:lvl1pPr>
+            <a:lvl2pPr marL="533400" indent="-228600">
+              <a:lnSpc>
+                <a:spcPct val="110000"/>
+              </a:lnSpc>
+              <a:spcBef>
+                <a:spcPts val="0"/>
+              </a:spcBef>
+              <a:spcAft>
+                <a:spcPts val="1200"/>
+              </a:spcAft>
+              <a:buChar char="•"/>
+            </a:lvl2pPr>
+            <a:lvl3pPr marL="838200" indent="-228600">
+              <a:lnSpc>
+                <a:spcPct val="110000"/>
+              </a:lnSpc>
+              <a:spcBef>
+                <a:spcPts val="0"/>
+              </a:spcBef>
+              <a:spcAft>
+                <a:spcPts val="1200"/>
+              </a:spcAft>
+              <a:buChar char="•"/>
+            </a:lvl3pPr>
+            <a:lvl4pPr marL="1143000" indent="-228600">
+              <a:lnSpc>
+                <a:spcPct val="110000"/>
+              </a:lnSpc>
+              <a:spcBef>
+                <a:spcPts val="0"/>
+              </a:spcBef>
+              <a:spcAft>
+                <a:spcPts val="1200"/>
+              </a:spcAft>
+              <a:buChar char="•"/>
+            </a:lvl4pPr>
+            <a:lvl5pPr marL="1447800" indent="-228600">
+              <a:lnSpc>
+                <a:spcPct val="110000"/>
+              </a:lnSpc>
+              <a:spcBef>
+                <a:spcPts val="0"/>
+              </a:spcBef>
+              <a:spcAft>
+                <a:spcPts val="1200"/>
+              </a:spcAft>
+              <a:buChar char="•"/>
+            </a:lvl5pPr>
+            <a:lvl6pPr marL="1752600" indent="-228600">
+              <a:lnSpc>
+                <a:spcPct val="110000"/>
+              </a:lnSpc>
+              <a:spcBef>
+                <a:spcPts val="0"/>
+              </a:spcBef>
+              <a:spcAft>
+                <a:spcPts val="1200"/>
+              </a:spcAft>
+              <a:buChar char="•"/>
+            </a:lvl6pPr>
+            <a:lvl7pPr marL="2057400" indent="-228600">
+              <a:lnSpc>
+                <a:spcPct val="110000"/>
+              </a:lnSpc>
+              <a:spcBef>
+                <a:spcPts val="0"/>
+              </a:spcBef>
+              <a:spcAft>
+                <a:spcPts val="1200"/>
+              </a:spcAft>
+              <a:buChar char="•"/>
+            </a:lvl7pPr>
+            <a:lvl8pPr marL="2362200" indent="-228600">
+              <a:lnSpc>
+                <a:spcPct val="110000"/>
+              </a:lnSpc>
+              <a:spcBef>
+                <a:spcPts val="0"/>
+              </a:spcBef>
+              <a:spcAft>
+                <a:spcPts val="1200"/>
+              </a:spcAft>
+              <a:buChar char="•"/>
+            </a:lvl8pPr>
+            <a:lvl9pPr marL="2667000" indent="-228600">
+              <a:lnSpc>
+                <a:spcPct val="110000"/>
+              </a:lnSpc>
+              <a:spcBef>
+                <a:spcPts val="0"/>
+              </a:spcBef>
+              <a:spcAft>
+                <a:spcPts val="1200"/>
+              </a:spcAft>
+              <a:buChar char="•"/>
+            </a:lvl9pPr>
+          </a:lstStyle>
+          <a:p xmlns:a="http://schemas.openxmlformats.org/drawingml/2006/main"/>
+        </p:txBody>
+      </p:sp>
+    </p:spTree>
+  </p:cSld>
+</p:sldLayout>
+</file>
+
+<file path=ppt/slideLayouts/slideLayout6.xml><?xml version="1.0" encoding="utf-8"?>
+<p:sldLayout xmlns:p="http://schemas.openxmlformats.org/presentationml/2006/main" type="blank">
+  <p:cSld name="Blank">
+    <p:spTree>
+      <p:nvGrpSpPr>
+        <p:cNvPr id="1" name=""/>
+        <p:cNvGrpSpPr/>
+        <p:nvPr/>
+      </p:nvGrpSpPr>
+      <p:grpSpPr>
+        <a:xfrm xmlns:a="http://schemas.openxmlformats.org/drawingml/2006/main"/>
+      </p:grpSpPr>
     </p:spTree>
   </p:cSld>
 </p:sldLayout>
@@ -895,7 +2550,12 @@
   </p:cSld>
   <p:clrMap bg1="lt1" tx1="dk1" bg2="lt2" tx2="dk2" accent1="accent1" accent2="accent2" accent3="accent3" accent4="accent4" accent5="accent5" accent6="accent6" hlink="hlink" folHlink="folHlink"/>
   <p:sldLayoutIdLst>
-    <p:sldLayoutId xmlns:r="http://schemas.openxmlformats.org/officeDocument/2006/relationships" id="2147483649" r:id="R62a907feaca74f47"/>
+    <p:sldLayoutId xmlns:r="http://schemas.openxmlformats.org/officeDocument/2006/relationships" id="2147483649" r:id="Rd207eb303fb547af"/>
+    <p:sldLayoutId xmlns:r="http://schemas.openxmlformats.org/officeDocument/2006/relationships" id="2147483650" r:id="R06e6a0dded694b0d"/>
+    <p:sldLayoutId xmlns:r="http://schemas.openxmlformats.org/officeDocument/2006/relationships" id="2147483651" r:id="Rc77eefc56be44719"/>
+    <p:sldLayoutId xmlns:r="http://schemas.openxmlformats.org/officeDocument/2006/relationships" id="2147483652" r:id="R307856824fd644d0"/>
+    <p:sldLayoutId xmlns:r="http://schemas.openxmlformats.org/officeDocument/2006/relationships" id="2147483653" r:id="Rbd3b166fed6e45e0"/>
+    <p:sldLayoutId xmlns:r="http://schemas.openxmlformats.org/officeDocument/2006/relationships" id="2147483654" r:id="R75be44f9addd4d3d"/>
   </p:sldLayoutIdLst>
   <p:txStyles>
     <p:titleStyle>
@@ -1218,16 +2878,16 @@
         <a:srgbClr val="96607D"/>
       </a:folHlink>
     </a:clrScheme>
-    <a:fontScheme name="Office">
+    <a:fontScheme name="">
       <a:majorFont>
-        <a:latin typeface="Calibri Light"/>
-        <a:ea typeface="Calibri Light"/>
-        <a:cs typeface="Calibri Light"/>
+        <a:latin typeface="Aptos"/>
+        <a:ea typeface=""/>
+        <a:cs typeface=""/>
       </a:majorFont>
       <a:minorFont>
-        <a:latin typeface="Calibri"/>
-        <a:ea typeface="Calibri"/>
-        <a:cs typeface="Calibri"/>
+        <a:latin typeface="Aptos"/>
+        <a:ea typeface=""/>
+        <a:cs typeface=""/>
       </a:minorFont>
     </a:fontScheme>
     <a:fmtScheme name="ChatGPT">
@@ -1446,7 +3106,7 @@
           <p:cNvPr id="5" name="">
             <a:extLst xmlns:a="http://schemas.openxmlformats.org/drawingml/2006/main">
               <a:ext uri="{FF2B5EF4-FFF2-40B4-BE49-F238E27FC236}">
-                <a16:creationId xmlns:a16="http://schemas.microsoft.com/office/drawing/2014/main" id="{C41DAD02-CE48-4E74-8D18-7AC4E444EB40}"/>
+                <a16:creationId xmlns:a16="http://schemas.microsoft.com/office/drawing/2014/main" id="{DA08B7C0-EEB5-41ED-85C8-8A86B698D988}"/>
               </a:ext>
             </a:extLst>
           </p:cNvPr>
@@ -1472,7 +3132,18 @@
           <a:bodyPr xmlns:a="http://schemas.openxmlformats.org/drawingml/2006/main" anchor="ctr">
             <a:noAutofit/>
           </a:bodyPr>
-          <a:lstStyle xmlns:a="http://schemas.openxmlformats.org/drawingml/2006/main"/>
+          <a:lstStyle xmlns:a="http://schemas.openxmlformats.org/drawingml/2006/main">
+            <a:defPPr algn="l">
+              <a:defRPr sz="2700" b="1">
+                <a:solidFill>
+                  <a:srgbClr val="161616"/>
+                </a:solidFill>
+                <a:latin typeface="Arial"/>
+                <a:ea typeface="Arial"/>
+                <a:cs typeface="Arial"/>
+              </a:defRPr>
+            </a:defPPr>
+          </a:lstStyle>
           <a:p xmlns:a="http://schemas.openxmlformats.org/drawingml/2006/main">
             <a:pPr algn="l">
               <a:defRPr sz="2700" b="1">
@@ -1503,7 +3174,7 @@
           <p:cNvPr id="2" name="">
             <a:extLst xmlns:a="http://schemas.openxmlformats.org/drawingml/2006/main">
               <a:ext uri="{FF2B5EF4-FFF2-40B4-BE49-F238E27FC236}">
-                <a16:creationId xmlns:a16="http://schemas.microsoft.com/office/drawing/2014/main" id="{7C41D3E7-4BC6-4B34-B5C6-8898A21A02D4}"/>
+                <a16:creationId xmlns:a16="http://schemas.microsoft.com/office/drawing/2014/main" id="{44AD48E4-C100-47C4-95BE-AA05A8AFA463}"/>
               </a:ext>
             </a:extLst>
           </p:cNvPr>
@@ -1529,7 +3200,18 @@
           <a:bodyPr xmlns:a="http://schemas.openxmlformats.org/drawingml/2006/main">
             <a:noAutofit/>
           </a:bodyPr>
-          <a:lstStyle xmlns:a="http://schemas.openxmlformats.org/drawingml/2006/main"/>
+          <a:lstStyle xmlns:a="http://schemas.openxmlformats.org/drawingml/2006/main">
+            <a:defPPr>
+              <a:defRPr sz="3750" b="1">
+                <a:solidFill>
+                  <a:srgbClr val="161616"/>
+                </a:solidFill>
+                <a:latin typeface="Arial"/>
+                <a:ea typeface="Arial"/>
+                <a:cs typeface="Arial"/>
+              </a:defRPr>
+            </a:defPPr>
+          </a:lstStyle>
           <a:p xmlns:a="http://schemas.openxmlformats.org/drawingml/2006/main">
             <a:pPr>
               <a:defRPr sz="3750" b="1">
@@ -1560,7 +3242,7 @@
           <p:cNvPr id="3" name="">
             <a:extLst xmlns:a="http://schemas.openxmlformats.org/drawingml/2006/main">
               <a:ext uri="{FF2B5EF4-FFF2-40B4-BE49-F238E27FC236}">
-                <a16:creationId xmlns:a16="http://schemas.microsoft.com/office/drawing/2014/main" id="{534B92C6-BC88-43F0-8F39-7F41A0051474}"/>
+                <a16:creationId xmlns:a16="http://schemas.microsoft.com/office/drawing/2014/main" id="{CCEEB131-C672-48EB-8784-414936A6320E}"/>
               </a:ext>
             </a:extLst>
           </p:cNvPr>
@@ -1586,7 +3268,18 @@
           <a:bodyPr xmlns:a="http://schemas.openxmlformats.org/drawingml/2006/main">
             <a:noAutofit/>
           </a:bodyPr>
-          <a:lstStyle xmlns:a="http://schemas.openxmlformats.org/drawingml/2006/main"/>
+          <a:lstStyle xmlns:a="http://schemas.openxmlformats.org/drawingml/2006/main">
+            <a:defPPr>
+              <a:defRPr sz="2250" b="0">
+                <a:solidFill>
+                  <a:srgbClr val="161616"/>
+                </a:solidFill>
+                <a:latin typeface="Arial"/>
+                <a:ea typeface="Arial"/>
+                <a:cs typeface="Arial"/>
+              </a:defRPr>
+            </a:defPPr>
+          </a:lstStyle>
           <a:p xmlns:a="http://schemas.openxmlformats.org/drawingml/2006/main">
             <a:pPr>
               <a:defRPr sz="2250" b="0">
@@ -1617,7 +3310,7 @@
           <p:cNvPr id="4" name="">
             <a:extLst xmlns:a="http://schemas.openxmlformats.org/drawingml/2006/main">
               <a:ext uri="{FF2B5EF4-FFF2-40B4-BE49-F238E27FC236}">
-                <a16:creationId xmlns:a16="http://schemas.microsoft.com/office/drawing/2014/main" id="{336B9807-B46D-4328-A3F6-C734BDC48A24}"/>
+                <a16:creationId xmlns:a16="http://schemas.microsoft.com/office/drawing/2014/main" id="{CB90E396-4BCB-47BD-80FA-E4EB62A0169E}"/>
               </a:ext>
             </a:extLst>
           </p:cNvPr>
@@ -1643,7 +3336,18 @@
           <a:bodyPr xmlns:a="http://schemas.openxmlformats.org/drawingml/2006/main">
             <a:noAutofit/>
           </a:bodyPr>
-          <a:lstStyle xmlns:a="http://schemas.openxmlformats.org/drawingml/2006/main"/>
+          <a:lstStyle xmlns:a="http://schemas.openxmlformats.org/drawingml/2006/main">
+            <a:defPPr>
+              <a:defRPr sz="1800" b="0">
+                <a:solidFill>
+                  <a:srgbClr val="161616"/>
+                </a:solidFill>
+                <a:latin typeface="Arial"/>
+                <a:ea typeface="Arial"/>
+                <a:cs typeface="Arial"/>
+              </a:defRPr>
+            </a:defPPr>
+          </a:lstStyle>
           <a:p xmlns:a="http://schemas.openxmlformats.org/drawingml/2006/main">
             <a:pPr>
               <a:defRPr sz="1800" b="0">
@@ -1695,7 +3399,7 @@
     </p:spTree>
     <p:extLst>
       <p:ext uri="{BB962C8B-B14F-4D97-AF65-F5344CB8AC3E}">
-        <p14:creationId xmlns:p14="http://schemas.microsoft.com/office/powerpoint/2010/main" val="2124358290"/>
+        <p14:creationId xmlns:p14="http://schemas.microsoft.com/office/powerpoint/2010/main" val="5951596"/>
       </p:ext>
     </p:extLst>
   </p:cSld>
@@ -1723,10 +3427,10 @@
       </p:grpSpPr>
       <p:sp>
         <p:nvSpPr>
-          <p:cNvPr id="10" name="">
+          <p:cNvPr id="3" name="">
             <a:extLst xmlns:a="http://schemas.openxmlformats.org/drawingml/2006/main">
               <a:ext uri="{FF2B5EF4-FFF2-40B4-BE49-F238E27FC236}">
-                <a16:creationId xmlns:a16="http://schemas.microsoft.com/office/drawing/2014/main" id="{EE6B2488-8BF6-4186-9AEE-5D45F0B54A62}"/>
+                <a16:creationId xmlns:a16="http://schemas.microsoft.com/office/drawing/2014/main" id="{C24DEBDF-2369-4741-B697-0388688EB01E}"/>
               </a:ext>
             </a:extLst>
           </p:cNvPr>
@@ -1752,7 +3456,18 @@
           <a:bodyPr xmlns:a="http://schemas.openxmlformats.org/drawingml/2006/main" anchor="ctr">
             <a:noAutofit/>
           </a:bodyPr>
-          <a:lstStyle xmlns:a="http://schemas.openxmlformats.org/drawingml/2006/main"/>
+          <a:lstStyle xmlns:a="http://schemas.openxmlformats.org/drawingml/2006/main">
+            <a:defPPr algn="l">
+              <a:defRPr sz="2700" b="1">
+                <a:solidFill>
+                  <a:srgbClr val="161616"/>
+                </a:solidFill>
+                <a:latin typeface="Arial"/>
+                <a:ea typeface="Arial"/>
+                <a:cs typeface="Arial"/>
+              </a:defRPr>
+            </a:defPPr>
+          </a:lstStyle>
           <a:p xmlns:a="http://schemas.openxmlformats.org/drawingml/2006/main">
             <a:pPr algn="l">
               <a:defRPr sz="2700" b="1">
@@ -1773,475 +3488,43 @@
                 <a:ea typeface="Arial"/>
                 <a:cs typeface="Arial"/>
               </a:rPr>
-              <a:t>Основная цепочка данных</a:t>
+              <a:t>Логическая модель данных</a:t>
             </a:r>
           </a:p>
         </p:txBody>
       </p:sp>
-      <p:sp>
-        <p:nvSpPr>
+      <p:pic>
+        <p:nvPicPr>
           <p:cNvPr id="2" name="">
             <a:extLst xmlns:a="http://schemas.openxmlformats.org/drawingml/2006/main">
               <a:ext uri="{FF2B5EF4-FFF2-40B4-BE49-F238E27FC236}">
-                <a16:creationId xmlns:a16="http://schemas.microsoft.com/office/drawing/2014/main" id="{084E2F9C-6BF1-4246-A9A8-E4BC3CF5F87F}"/>
+                <a16:creationId xmlns:a16="http://schemas.microsoft.com/office/drawing/2014/main" id="{3E5E596C-FA4A-4ECF-94A7-3BCC3CBA4468}"/>
               </a:ext>
             </a:extLst>
           </p:cNvPr>
-          <p:cNvSpPr>
-            <a:spLocks xmlns:a="http://schemas.openxmlformats.org/drawingml/2006/main" noGrp="1"/>
-          </p:cNvSpPr>
+          <p:cNvPicPr>
+            <a:picLocks xmlns:a="http://schemas.openxmlformats.org/drawingml/2006/main" noChangeAspect="1"/>
+          </p:cNvPicPr>
           <p:nvPr/>
-        </p:nvSpPr>
+        </p:nvPicPr>
+        <p:blipFill>
+          <a:blip xmlns:r="http://schemas.openxmlformats.org/officeDocument/2006/relationships" xmlns:a="http://schemas.openxmlformats.org/drawingml/2006/main" r:embed="Redc7a93df5154b66"/>
+          <a:stretch xmlns:a="http://schemas.openxmlformats.org/drawingml/2006/main"/>
+        </p:blipFill>
         <p:spPr>
           <a:xfrm xmlns:a="http://schemas.openxmlformats.org/drawingml/2006/main">
-            <a:off x="714375" y="2238375"/>
-            <a:ext cx="2416969" cy="1428750"/>
-          </a:xfrm>
-          <a:prstGeom xmlns:a="http://schemas.openxmlformats.org/drawingml/2006/main" prst="roundRect">
-            <a:avLst>
-              <a:gd name="adj" fmla="val 5333"/>
-            </a:avLst>
-          </a:prstGeom>
-          <a:solidFill xmlns:a="http://schemas.openxmlformats.org/drawingml/2006/main">
-            <a:srgbClr val="FFFFFF"/>
-          </a:solidFill>
-          <a:ln xmlns:a="http://schemas.openxmlformats.org/drawingml/2006/main" w="19050">
-            <a:solidFill>
-              <a:srgbClr val="333333"/>
-            </a:solidFill>
-          </a:ln>
-        </p:spPr>
-        <p:txBody>
-          <a:bodyPr xmlns:a="http://schemas.openxmlformats.org/drawingml/2006/main" anchor="ctr"/>
-          <a:lstStyle xmlns:a="http://schemas.openxmlformats.org/drawingml/2006/main"/>
-          <a:p xmlns:a="http://schemas.openxmlformats.org/drawingml/2006/main">
-            <a:pPr algn="ctr">
-              <a:defRPr sz="1875">
-                <a:solidFill>
-                  <a:srgbClr val="111111"/>
-                </a:solidFill>
-                <a:latin typeface="Arial"/>
-                <a:ea typeface="Arial"/>
-                <a:cs typeface="Arial"/>
-              </a:defRPr>
-            </a:pPr>
-            <a:r>
-              <a:rPr sz="1875">
-                <a:solidFill>
-                  <a:srgbClr val="111111"/>
-                </a:solidFill>
-                <a:latin typeface="Arial"/>
-                <a:ea typeface="Arial"/>
-                <a:cs typeface="Arial"/>
-              </a:rPr>
-              <a:t>Модельный</a:t>
-            </a:r>
-          </a:p>
-          <a:p xmlns:a="http://schemas.openxmlformats.org/drawingml/2006/main">
-            <a:pPr algn="ctr">
-              <a:defRPr sz="1875">
-                <a:solidFill>
-                  <a:srgbClr val="111111"/>
-                </a:solidFill>
-                <a:latin typeface="Arial"/>
-                <a:ea typeface="Arial"/>
-                <a:cs typeface="Arial"/>
-              </a:defRPr>
-            </a:pPr>
-            <a:r>
-              <a:rPr sz="1875">
-                <a:solidFill>
-                  <a:srgbClr val="111111"/>
-                </a:solidFill>
-                <a:latin typeface="Arial"/>
-                <a:ea typeface="Arial"/>
-                <a:cs typeface="Arial"/>
-              </a:rPr>
-              <a:t>ряд</a:t>
-            </a:r>
-          </a:p>
-        </p:txBody>
-      </p:sp>
-      <p:sp>
-        <p:nvSpPr>
-          <p:cNvPr id="3" name="">
-            <a:extLst xmlns:a="http://schemas.openxmlformats.org/drawingml/2006/main">
-              <a:ext uri="{FF2B5EF4-FFF2-40B4-BE49-F238E27FC236}">
-                <a16:creationId xmlns:a16="http://schemas.microsoft.com/office/drawing/2014/main" id="{0850F476-88FC-4B48-BC7F-486243762ADB}"/>
-              </a:ext>
-            </a:extLst>
-          </p:cNvPr>
-          <p:cNvSpPr>
-            <a:spLocks xmlns:a="http://schemas.openxmlformats.org/drawingml/2006/main" noGrp="1"/>
-          </p:cNvSpPr>
-          <p:nvPr/>
-        </p:nvSpPr>
-        <p:spPr>
-          <a:xfrm xmlns:a="http://schemas.openxmlformats.org/drawingml/2006/main">
-            <a:off x="3188494" y="2800350"/>
-            <a:ext cx="228600" cy="266700"/>
-          </a:xfrm>
-          <a:prstGeom xmlns:a="http://schemas.openxmlformats.org/drawingml/2006/main" prst="rightArrow">
-            <a:avLst/>
-          </a:prstGeom>
-          <a:solidFill xmlns:a="http://schemas.openxmlformats.org/drawingml/2006/main">
-            <a:srgbClr val="444444"/>
-          </a:solidFill>
-          <a:ln xmlns:a="http://schemas.openxmlformats.org/drawingml/2006/main" w="0">
-            <a:noFill/>
-          </a:ln>
-        </p:spPr>
-      </p:sp>
-      <p:sp>
-        <p:nvSpPr>
-          <p:cNvPr id="4" name="">
-            <a:extLst xmlns:a="http://schemas.openxmlformats.org/drawingml/2006/main">
-              <a:ext uri="{FF2B5EF4-FFF2-40B4-BE49-F238E27FC236}">
-                <a16:creationId xmlns:a16="http://schemas.microsoft.com/office/drawing/2014/main" id="{D3AA9E2A-9D5D-441B-A844-D56DC6582BA7}"/>
-              </a:ext>
-            </a:extLst>
-          </p:cNvPr>
-          <p:cNvSpPr>
-            <a:spLocks xmlns:a="http://schemas.openxmlformats.org/drawingml/2006/main" noGrp="1"/>
-          </p:cNvSpPr>
-          <p:nvPr/>
-        </p:nvSpPr>
-        <p:spPr>
-          <a:xfrm xmlns:a="http://schemas.openxmlformats.org/drawingml/2006/main">
-            <a:off x="3464719" y="2238375"/>
-            <a:ext cx="2416969" cy="1428750"/>
-          </a:xfrm>
-          <a:prstGeom xmlns:a="http://schemas.openxmlformats.org/drawingml/2006/main" prst="roundRect">
-            <a:avLst>
-              <a:gd name="adj" fmla="val 5333"/>
-            </a:avLst>
-          </a:prstGeom>
-          <a:solidFill xmlns:a="http://schemas.openxmlformats.org/drawingml/2006/main">
-            <a:srgbClr val="FFFFFF"/>
-          </a:solidFill>
-          <a:ln xmlns:a="http://schemas.openxmlformats.org/drawingml/2006/main" w="19050">
-            <a:solidFill>
-              <a:srgbClr val="333333"/>
-            </a:solidFill>
-          </a:ln>
-        </p:spPr>
-        <p:txBody>
-          <a:bodyPr xmlns:a="http://schemas.openxmlformats.org/drawingml/2006/main" anchor="ctr"/>
-          <a:lstStyle xmlns:a="http://schemas.openxmlformats.org/drawingml/2006/main"/>
-          <a:p xmlns:a="http://schemas.openxmlformats.org/drawingml/2006/main">
-            <a:pPr algn="ctr">
-              <a:defRPr sz="1875">
-                <a:solidFill>
-                  <a:srgbClr val="111111"/>
-                </a:solidFill>
-                <a:latin typeface="Arial"/>
-                <a:ea typeface="Arial"/>
-                <a:cs typeface="Arial"/>
-              </a:defRPr>
-            </a:pPr>
-            <a:r>
-              <a:rPr sz="1875">
-                <a:solidFill>
-                  <a:srgbClr val="111111"/>
-                </a:solidFill>
-                <a:latin typeface="Arial"/>
-                <a:ea typeface="Arial"/>
-                <a:cs typeface="Arial"/>
-              </a:rPr>
-              <a:t>Версия</a:t>
-            </a:r>
-          </a:p>
-          <a:p xmlns:a="http://schemas.openxmlformats.org/drawingml/2006/main">
-            <a:pPr algn="ctr">
-              <a:defRPr sz="1875">
-                <a:solidFill>
-                  <a:srgbClr val="111111"/>
-                </a:solidFill>
-                <a:latin typeface="Arial"/>
-                <a:ea typeface="Arial"/>
-                <a:cs typeface="Arial"/>
-              </a:defRPr>
-            </a:pPr>
-            <a:r>
-              <a:rPr sz="1875">
-                <a:solidFill>
-                  <a:srgbClr val="111111"/>
-                </a:solidFill>
-                <a:latin typeface="Arial"/>
-                <a:ea typeface="Arial"/>
-                <a:cs typeface="Arial"/>
-              </a:rPr>
-              <a:t>модельного ряда</a:t>
-            </a:r>
-          </a:p>
-        </p:txBody>
-      </p:sp>
-      <p:sp>
-        <p:nvSpPr>
-          <p:cNvPr id="5" name="">
-            <a:extLst xmlns:a="http://schemas.openxmlformats.org/drawingml/2006/main">
-              <a:ext uri="{FF2B5EF4-FFF2-40B4-BE49-F238E27FC236}">
-                <a16:creationId xmlns:a16="http://schemas.microsoft.com/office/drawing/2014/main" id="{C9488C8A-0BBC-4C19-9AD9-8C02A7241FD8}"/>
-              </a:ext>
-            </a:extLst>
-          </p:cNvPr>
-          <p:cNvSpPr>
-            <a:spLocks xmlns:a="http://schemas.openxmlformats.org/drawingml/2006/main" noGrp="1"/>
-          </p:cNvSpPr>
-          <p:nvPr/>
-        </p:nvSpPr>
-        <p:spPr>
-          <a:xfrm xmlns:a="http://schemas.openxmlformats.org/drawingml/2006/main">
-            <a:off x="5938838" y="2800350"/>
-            <a:ext cx="228600" cy="266700"/>
-          </a:xfrm>
-          <a:prstGeom xmlns:a="http://schemas.openxmlformats.org/drawingml/2006/main" prst="rightArrow">
-            <a:avLst/>
-          </a:prstGeom>
-          <a:solidFill xmlns:a="http://schemas.openxmlformats.org/drawingml/2006/main">
-            <a:srgbClr val="444444"/>
-          </a:solidFill>
-          <a:ln xmlns:a="http://schemas.openxmlformats.org/drawingml/2006/main" w="0">
-            <a:noFill/>
-          </a:ln>
-        </p:spPr>
-      </p:sp>
-      <p:sp>
-        <p:nvSpPr>
-          <p:cNvPr id="6" name="">
-            <a:extLst xmlns:a="http://schemas.openxmlformats.org/drawingml/2006/main">
-              <a:ext uri="{FF2B5EF4-FFF2-40B4-BE49-F238E27FC236}">
-                <a16:creationId xmlns:a16="http://schemas.microsoft.com/office/drawing/2014/main" id="{38536D5A-5334-4A1C-B2A3-F21E0F1A5100}"/>
-              </a:ext>
-            </a:extLst>
-          </p:cNvPr>
-          <p:cNvSpPr>
-            <a:spLocks xmlns:a="http://schemas.openxmlformats.org/drawingml/2006/main" noGrp="1"/>
-          </p:cNvSpPr>
-          <p:nvPr/>
-        </p:nvSpPr>
-        <p:spPr>
-          <a:xfrm xmlns:a="http://schemas.openxmlformats.org/drawingml/2006/main">
-            <a:off x="6215063" y="2238375"/>
-            <a:ext cx="2416969" cy="1428750"/>
-          </a:xfrm>
-          <a:prstGeom xmlns:a="http://schemas.openxmlformats.org/drawingml/2006/main" prst="roundRect">
-            <a:avLst>
-              <a:gd name="adj" fmla="val 5333"/>
-            </a:avLst>
-          </a:prstGeom>
-          <a:solidFill xmlns:a="http://schemas.openxmlformats.org/drawingml/2006/main">
-            <a:srgbClr val="FFFFFF"/>
-          </a:solidFill>
-          <a:ln xmlns:a="http://schemas.openxmlformats.org/drawingml/2006/main" w="19050">
-            <a:solidFill>
-              <a:srgbClr val="333333"/>
-            </a:solidFill>
-          </a:ln>
-        </p:spPr>
-        <p:txBody>
-          <a:bodyPr xmlns:a="http://schemas.openxmlformats.org/drawingml/2006/main" anchor="ctr"/>
-          <a:lstStyle xmlns:a="http://schemas.openxmlformats.org/drawingml/2006/main"/>
-          <a:p xmlns:a="http://schemas.openxmlformats.org/drawingml/2006/main">
-            <a:pPr algn="ctr">
-              <a:defRPr sz="1875">
-                <a:solidFill>
-                  <a:srgbClr val="111111"/>
-                </a:solidFill>
-                <a:latin typeface="Arial"/>
-                <a:ea typeface="Arial"/>
-                <a:cs typeface="Arial"/>
-              </a:defRPr>
-            </a:pPr>
-            <a:r>
-              <a:rPr sz="1875">
-                <a:solidFill>
-                  <a:srgbClr val="111111"/>
-                </a:solidFill>
-                <a:latin typeface="Arial"/>
-                <a:ea typeface="Arial"/>
-                <a:cs typeface="Arial"/>
-              </a:rPr>
-              <a:t>Версия</a:t>
-            </a:r>
-          </a:p>
-          <a:p xmlns:a="http://schemas.openxmlformats.org/drawingml/2006/main">
-            <a:pPr algn="ctr">
-              <a:defRPr sz="1875">
-                <a:solidFill>
-                  <a:srgbClr val="111111"/>
-                </a:solidFill>
-                <a:latin typeface="Arial"/>
-                <a:ea typeface="Arial"/>
-                <a:cs typeface="Arial"/>
-              </a:defRPr>
-            </a:pPr>
-            <a:r>
-              <a:rPr sz="1875">
-                <a:solidFill>
-                  <a:srgbClr val="111111"/>
-                </a:solidFill>
-                <a:latin typeface="Arial"/>
-                <a:ea typeface="Arial"/>
-                <a:cs typeface="Arial"/>
-              </a:rPr>
-              <a:t>карточки</a:t>
-            </a:r>
-          </a:p>
-        </p:txBody>
-      </p:sp>
-      <p:sp>
-        <p:nvSpPr>
-          <p:cNvPr id="7" name="">
-            <a:extLst xmlns:a="http://schemas.openxmlformats.org/drawingml/2006/main">
-              <a:ext uri="{FF2B5EF4-FFF2-40B4-BE49-F238E27FC236}">
-                <a16:creationId xmlns:a16="http://schemas.microsoft.com/office/drawing/2014/main" id="{28025B3C-F519-421E-87B0-E08D0240FB9B}"/>
-              </a:ext>
-            </a:extLst>
-          </p:cNvPr>
-          <p:cNvSpPr>
-            <a:spLocks xmlns:a="http://schemas.openxmlformats.org/drawingml/2006/main" noGrp="1"/>
-          </p:cNvSpPr>
-          <p:nvPr/>
-        </p:nvSpPr>
-        <p:spPr>
-          <a:xfrm xmlns:a="http://schemas.openxmlformats.org/drawingml/2006/main">
-            <a:off x="8689181" y="2800350"/>
-            <a:ext cx="228600" cy="266700"/>
-          </a:xfrm>
-          <a:prstGeom xmlns:a="http://schemas.openxmlformats.org/drawingml/2006/main" prst="rightArrow">
-            <a:avLst/>
-          </a:prstGeom>
-          <a:solidFill xmlns:a="http://schemas.openxmlformats.org/drawingml/2006/main">
-            <a:srgbClr val="444444"/>
-          </a:solidFill>
-          <a:ln xmlns:a="http://schemas.openxmlformats.org/drawingml/2006/main" w="0">
-            <a:noFill/>
-          </a:ln>
-        </p:spPr>
-      </p:sp>
-      <p:sp>
-        <p:nvSpPr>
-          <p:cNvPr id="8" name="">
-            <a:extLst xmlns:a="http://schemas.openxmlformats.org/drawingml/2006/main">
-              <a:ext uri="{FF2B5EF4-FFF2-40B4-BE49-F238E27FC236}">
-                <a16:creationId xmlns:a16="http://schemas.microsoft.com/office/drawing/2014/main" id="{A3D4BC0F-0C70-4959-B7A3-303C0D168196}"/>
-              </a:ext>
-            </a:extLst>
-          </p:cNvPr>
-          <p:cNvSpPr>
-            <a:spLocks xmlns:a="http://schemas.openxmlformats.org/drawingml/2006/main" noGrp="1"/>
-          </p:cNvSpPr>
-          <p:nvPr/>
-        </p:nvSpPr>
-        <p:spPr>
-          <a:xfrm xmlns:a="http://schemas.openxmlformats.org/drawingml/2006/main">
-            <a:off x="8965406" y="2238375"/>
-            <a:ext cx="2416969" cy="1428750"/>
-          </a:xfrm>
-          <a:prstGeom xmlns:a="http://schemas.openxmlformats.org/drawingml/2006/main" prst="roundRect">
-            <a:avLst>
-              <a:gd name="adj" fmla="val 5333"/>
-            </a:avLst>
-          </a:prstGeom>
-          <a:solidFill xmlns:a="http://schemas.openxmlformats.org/drawingml/2006/main">
-            <a:srgbClr val="FFFFFF"/>
-          </a:solidFill>
-          <a:ln xmlns:a="http://schemas.openxmlformats.org/drawingml/2006/main" w="19050">
-            <a:solidFill>
-              <a:srgbClr val="333333"/>
-            </a:solidFill>
-          </a:ln>
-        </p:spPr>
-        <p:txBody>
-          <a:bodyPr xmlns:a="http://schemas.openxmlformats.org/drawingml/2006/main" anchor="ctr"/>
-          <a:lstStyle xmlns:a="http://schemas.openxmlformats.org/drawingml/2006/main"/>
-          <a:p xmlns:a="http://schemas.openxmlformats.org/drawingml/2006/main">
-            <a:pPr algn="ctr">
-              <a:defRPr sz="1875">
-                <a:solidFill>
-                  <a:srgbClr val="111111"/>
-                </a:solidFill>
-                <a:latin typeface="Arial"/>
-                <a:ea typeface="Arial"/>
-                <a:cs typeface="Arial"/>
-              </a:defRPr>
-            </a:pPr>
-            <a:r>
-              <a:rPr sz="1875">
-                <a:solidFill>
-                  <a:srgbClr val="111111"/>
-                </a:solidFill>
-                <a:latin typeface="Arial"/>
-                <a:ea typeface="Arial"/>
-                <a:cs typeface="Arial"/>
-              </a:rPr>
-              <a:t>Публикация</a:t>
-            </a:r>
-          </a:p>
-        </p:txBody>
-      </p:sp>
-      <p:sp>
-        <p:nvSpPr>
-          <p:cNvPr id="9" name="">
-            <a:extLst xmlns:a="http://schemas.openxmlformats.org/drawingml/2006/main">
-              <a:ext uri="{FF2B5EF4-FFF2-40B4-BE49-F238E27FC236}">
-                <a16:creationId xmlns:a16="http://schemas.microsoft.com/office/drawing/2014/main" id="{4302C2AC-8B73-47D8-8ABC-D615B76EF221}"/>
-              </a:ext>
-            </a:extLst>
-          </p:cNvPr>
-          <p:cNvSpPr>
-            <a:spLocks xmlns:a="http://schemas.openxmlformats.org/drawingml/2006/main" noGrp="1"/>
-          </p:cNvSpPr>
-          <p:nvPr/>
-        </p:nvSpPr>
-        <p:spPr>
-          <a:xfrm xmlns:a="http://schemas.openxmlformats.org/drawingml/2006/main">
-            <a:off x="714375" y="4429125"/>
-            <a:ext cx="10572750" cy="1285875"/>
+            <a:off x="2552330" y="1285875"/>
+            <a:ext cx="7087341" cy="5000625"/>
           </a:xfrm>
           <a:prstGeom xmlns:a="http://schemas.openxmlformats.org/drawingml/2006/main" prst="rect">
             <a:avLst/>
           </a:prstGeom>
-          <a:noFill xmlns:a="http://schemas.openxmlformats.org/drawingml/2006/main"/>
-          <a:ln xmlns:a="http://schemas.openxmlformats.org/drawingml/2006/main" w="0">
-            <a:noFill/>
-          </a:ln>
         </p:spPr>
-        <p:txBody>
-          <a:bodyPr xmlns:a="http://schemas.openxmlformats.org/drawingml/2006/main">
-            <a:noAutofit/>
-          </a:bodyPr>
-          <a:lstStyle xmlns:a="http://schemas.openxmlformats.org/drawingml/2006/main"/>
-          <a:p xmlns:a="http://schemas.openxmlformats.org/drawingml/2006/main">
-            <a:pPr>
-              <a:defRPr sz="2175" b="0">
-                <a:solidFill>
-                  <a:srgbClr val="161616"/>
-                </a:solidFill>
-                <a:latin typeface="Arial"/>
-                <a:ea typeface="Arial"/>
-                <a:cs typeface="Arial"/>
-              </a:defRPr>
-            </a:pPr>
-            <a:r>
-              <a:rPr sz="2175" b="0">
-                <a:solidFill>
-                  <a:srgbClr val="161616"/>
-                </a:solidFill>
-                <a:latin typeface="Arial"/>
-                <a:ea typeface="Arial"/>
-                <a:cs typeface="Arial"/>
-              </a:rPr>
-              <a:t>Публикация относится к неизменяемому снимку. Новая версия модельного ряда не перезаписывает историю.</a:t>
-            </a:r>
-          </a:p>
-        </p:txBody>
-      </p:sp>
+      </p:pic>
     </p:spTree>
     <p:extLst>
       <p:ext uri="{BB962C8B-B14F-4D97-AF65-F5344CB8AC3E}">
-        <p14:creationId xmlns:p14="http://schemas.microsoft.com/office/powerpoint/2010/main" val="1031011956"/>
+        <p14:creationId xmlns:p14="http://schemas.microsoft.com/office/powerpoint/2010/main" val="1675779246"/>
       </p:ext>
     </p:extLst>
   </p:cSld>
@@ -2272,7 +3555,7 @@
           <p:cNvPr id="3" name="">
             <a:extLst xmlns:a="http://schemas.openxmlformats.org/drawingml/2006/main">
               <a:ext uri="{FF2B5EF4-FFF2-40B4-BE49-F238E27FC236}">
-                <a16:creationId xmlns:a16="http://schemas.microsoft.com/office/drawing/2014/main" id="{8AB0E7D4-36B2-488E-A344-F22D2B697808}"/>
+                <a16:creationId xmlns:a16="http://schemas.microsoft.com/office/drawing/2014/main" id="{B5FB64A5-F353-4072-8B46-6A88B29644AB}"/>
               </a:ext>
             </a:extLst>
           </p:cNvPr>
@@ -2298,7 +3581,18 @@
           <a:bodyPr xmlns:a="http://schemas.openxmlformats.org/drawingml/2006/main" anchor="ctr">
             <a:noAutofit/>
           </a:bodyPr>
-          <a:lstStyle xmlns:a="http://schemas.openxmlformats.org/drawingml/2006/main"/>
+          <a:lstStyle xmlns:a="http://schemas.openxmlformats.org/drawingml/2006/main">
+            <a:defPPr algn="l">
+              <a:defRPr sz="2700" b="1">
+                <a:solidFill>
+                  <a:srgbClr val="161616"/>
+                </a:solidFill>
+                <a:latin typeface="Arial"/>
+                <a:ea typeface="Arial"/>
+                <a:cs typeface="Arial"/>
+              </a:defRPr>
+            </a:defPPr>
+          </a:lstStyle>
           <a:p xmlns:a="http://schemas.openxmlformats.org/drawingml/2006/main">
             <a:pPr algn="l">
               <a:defRPr sz="2700" b="1">
@@ -2326,7 +3620,13 @@
       </p:sp>
       <p:graphicFrame>
         <p:nvGraphicFramePr>
-          <p:cNvPr id="4" name=""/>
+          <p:cNvPr id="2" name="">
+            <a:extLst xmlns:a="http://schemas.openxmlformats.org/drawingml/2006/main">
+              <a:ext uri="{FF2B5EF4-FFF2-40B4-BE49-F238E27FC236}">
+                <a16:creationId xmlns:a16="http://schemas.microsoft.com/office/drawing/2014/main" id="{E01449F7-F5C5-4ADE-B0BF-CC58FEE70F95}"/>
+              </a:ext>
+            </a:extLst>
+          </p:cNvPr>
           <p:cNvGraphicFramePr/>
           <p:nvPr/>
         </p:nvGraphicFramePr>
@@ -2363,6 +3663,30 @@
                     </a:p>
                   </a:txBody>
                   <a:tcPr marL="91440" marR="91440" marT="45720" marB="45720">
+                    <a:lnL w="9525">
+                      <a:solidFill>
+                        <a:srgbClr val="888888"/>
+                      </a:solidFill>
+                      <a:prstDash val="solid"/>
+                    </a:lnL>
+                    <a:lnR w="9525">
+                      <a:solidFill>
+                        <a:srgbClr val="888888"/>
+                      </a:solidFill>
+                      <a:prstDash val="solid"/>
+                    </a:lnR>
+                    <a:lnT w="9525">
+                      <a:solidFill>
+                        <a:srgbClr val="888888"/>
+                      </a:solidFill>
+                      <a:prstDash val="solid"/>
+                    </a:lnT>
+                    <a:lnB w="9525">
+                      <a:solidFill>
+                        <a:srgbClr val="888888"/>
+                      </a:solidFill>
+                      <a:prstDash val="solid"/>
+                    </a:lnB>
                     <a:solidFill>
                       <a:srgbClr val="F1F1F1"/>
                     </a:solidFill>
@@ -2387,6 +3711,24 @@
                     </a:p>
                   </a:txBody>
                   <a:tcPr marL="91440" marR="91440" marT="45720" marB="45720">
+                    <a:lnR w="9525">
+                      <a:solidFill>
+                        <a:srgbClr val="888888"/>
+                      </a:solidFill>
+                      <a:prstDash val="solid"/>
+                    </a:lnR>
+                    <a:lnT w="9525">
+                      <a:solidFill>
+                        <a:srgbClr val="888888"/>
+                      </a:solidFill>
+                      <a:prstDash val="solid"/>
+                    </a:lnT>
+                    <a:lnB w="9525">
+                      <a:solidFill>
+                        <a:srgbClr val="888888"/>
+                      </a:solidFill>
+                      <a:prstDash val="solid"/>
+                    </a:lnB>
                     <a:solidFill>
                       <a:srgbClr val="F1F1F1"/>
                     </a:solidFill>
@@ -2411,6 +3753,24 @@
                     </a:p>
                   </a:txBody>
                   <a:tcPr marL="91440" marR="91440" marT="45720" marB="45720">
+                    <a:lnR w="9525">
+                      <a:solidFill>
+                        <a:srgbClr val="888888"/>
+                      </a:solidFill>
+                      <a:prstDash val="solid"/>
+                    </a:lnR>
+                    <a:lnT w="9525">
+                      <a:solidFill>
+                        <a:srgbClr val="888888"/>
+                      </a:solidFill>
+                      <a:prstDash val="solid"/>
+                    </a:lnT>
+                    <a:lnB w="9525">
+                      <a:solidFill>
+                        <a:srgbClr val="888888"/>
+                      </a:solidFill>
+                      <a:prstDash val="solid"/>
+                    </a:lnB>
                     <a:solidFill>
                       <a:srgbClr val="F1F1F1"/>
                     </a:solidFill>
@@ -2437,6 +3797,24 @@
                     </a:p>
                   </a:txBody>
                   <a:tcPr marL="91440" marR="91440" marT="45720" marB="45720">
+                    <a:lnL w="9525">
+                      <a:solidFill>
+                        <a:srgbClr val="888888"/>
+                      </a:solidFill>
+                      <a:prstDash val="solid"/>
+                    </a:lnL>
+                    <a:lnR w="9525">
+                      <a:solidFill>
+                        <a:srgbClr val="888888"/>
+                      </a:solidFill>
+                      <a:prstDash val="solid"/>
+                    </a:lnR>
+                    <a:lnB w="9525">
+                      <a:solidFill>
+                        <a:srgbClr val="888888"/>
+                      </a:solidFill>
+                      <a:prstDash val="solid"/>
+                    </a:lnB>
                     <a:solidFill>
                       <a:srgbClr val="FFFFFF"/>
                     </a:solidFill>
@@ -2461,6 +3839,18 @@
                     </a:p>
                   </a:txBody>
                   <a:tcPr marL="91440" marR="91440" marT="45720" marB="45720">
+                    <a:lnR w="9525">
+                      <a:solidFill>
+                        <a:srgbClr val="888888"/>
+                      </a:solidFill>
+                      <a:prstDash val="solid"/>
+                    </a:lnR>
+                    <a:lnB w="9525">
+                      <a:solidFill>
+                        <a:srgbClr val="888888"/>
+                      </a:solidFill>
+                      <a:prstDash val="solid"/>
+                    </a:lnB>
                     <a:solidFill>
                       <a:srgbClr val="FFFFFF"/>
                     </a:solidFill>
@@ -2485,6 +3875,18 @@
                     </a:p>
                   </a:txBody>
                   <a:tcPr marL="91440" marR="91440" marT="45720" marB="45720">
+                    <a:lnR w="9525">
+                      <a:solidFill>
+                        <a:srgbClr val="888888"/>
+                      </a:solidFill>
+                      <a:prstDash val="solid"/>
+                    </a:lnR>
+                    <a:lnB w="9525">
+                      <a:solidFill>
+                        <a:srgbClr val="888888"/>
+                      </a:solidFill>
+                      <a:prstDash val="solid"/>
+                    </a:lnB>
                     <a:solidFill>
                       <a:srgbClr val="FFFFFF"/>
                     </a:solidFill>
@@ -2511,6 +3913,24 @@
                     </a:p>
                   </a:txBody>
                   <a:tcPr marL="91440" marR="91440" marT="45720" marB="45720">
+                    <a:lnL w="9525">
+                      <a:solidFill>
+                        <a:srgbClr val="888888"/>
+                      </a:solidFill>
+                      <a:prstDash val="solid"/>
+                    </a:lnL>
+                    <a:lnR w="9525">
+                      <a:solidFill>
+                        <a:srgbClr val="888888"/>
+                      </a:solidFill>
+                      <a:prstDash val="solid"/>
+                    </a:lnR>
+                    <a:lnB w="9525">
+                      <a:solidFill>
+                        <a:srgbClr val="888888"/>
+                      </a:solidFill>
+                      <a:prstDash val="solid"/>
+                    </a:lnB>
                     <a:solidFill>
                       <a:srgbClr val="FFFFFF"/>
                     </a:solidFill>
@@ -2535,6 +3955,18 @@
                     </a:p>
                   </a:txBody>
                   <a:tcPr marL="91440" marR="91440" marT="45720" marB="45720">
+                    <a:lnR w="9525">
+                      <a:solidFill>
+                        <a:srgbClr val="888888"/>
+                      </a:solidFill>
+                      <a:prstDash val="solid"/>
+                    </a:lnR>
+                    <a:lnB w="9525">
+                      <a:solidFill>
+                        <a:srgbClr val="888888"/>
+                      </a:solidFill>
+                      <a:prstDash val="solid"/>
+                    </a:lnB>
                     <a:solidFill>
                       <a:srgbClr val="FFFFFF"/>
                     </a:solidFill>
@@ -2559,6 +3991,18 @@
                     </a:p>
                   </a:txBody>
                   <a:tcPr marL="91440" marR="91440" marT="45720" marB="45720">
+                    <a:lnR w="9525">
+                      <a:solidFill>
+                        <a:srgbClr val="888888"/>
+                      </a:solidFill>
+                      <a:prstDash val="solid"/>
+                    </a:lnR>
+                    <a:lnB w="9525">
+                      <a:solidFill>
+                        <a:srgbClr val="888888"/>
+                      </a:solidFill>
+                      <a:prstDash val="solid"/>
+                    </a:lnB>
                     <a:solidFill>
                       <a:srgbClr val="FFFFFF"/>
                     </a:solidFill>
@@ -2585,6 +4029,24 @@
                     </a:p>
                   </a:txBody>
                   <a:tcPr marL="91440" marR="91440" marT="45720" marB="45720">
+                    <a:lnL w="9525">
+                      <a:solidFill>
+                        <a:srgbClr val="888888"/>
+                      </a:solidFill>
+                      <a:prstDash val="solid"/>
+                    </a:lnL>
+                    <a:lnR w="9525">
+                      <a:solidFill>
+                        <a:srgbClr val="888888"/>
+                      </a:solidFill>
+                      <a:prstDash val="solid"/>
+                    </a:lnR>
+                    <a:lnB w="9525">
+                      <a:solidFill>
+                        <a:srgbClr val="888888"/>
+                      </a:solidFill>
+                      <a:prstDash val="solid"/>
+                    </a:lnB>
                     <a:solidFill>
                       <a:srgbClr val="FFFFFF"/>
                     </a:solidFill>
@@ -2609,6 +4071,18 @@
                     </a:p>
                   </a:txBody>
                   <a:tcPr marL="91440" marR="91440" marT="45720" marB="45720">
+                    <a:lnR w="9525">
+                      <a:solidFill>
+                        <a:srgbClr val="888888"/>
+                      </a:solidFill>
+                      <a:prstDash val="solid"/>
+                    </a:lnR>
+                    <a:lnB w="9525">
+                      <a:solidFill>
+                        <a:srgbClr val="888888"/>
+                      </a:solidFill>
+                      <a:prstDash val="solid"/>
+                    </a:lnB>
                     <a:solidFill>
                       <a:srgbClr val="FFFFFF"/>
                     </a:solidFill>
@@ -2633,6 +4107,18 @@
                     </a:p>
                   </a:txBody>
                   <a:tcPr marL="91440" marR="91440" marT="45720" marB="45720">
+                    <a:lnR w="9525">
+                      <a:solidFill>
+                        <a:srgbClr val="888888"/>
+                      </a:solidFill>
+                      <a:prstDash val="solid"/>
+                    </a:lnR>
+                    <a:lnB w="9525">
+                      <a:solidFill>
+                        <a:srgbClr val="888888"/>
+                      </a:solidFill>
+                      <a:prstDash val="solid"/>
+                    </a:lnB>
                     <a:solidFill>
                       <a:srgbClr val="FFFFFF"/>
                     </a:solidFill>
@@ -2659,6 +4145,24 @@
                     </a:p>
                   </a:txBody>
                   <a:tcPr marL="91440" marR="91440" marT="45720" marB="45720">
+                    <a:lnL w="9525">
+                      <a:solidFill>
+                        <a:srgbClr val="888888"/>
+                      </a:solidFill>
+                      <a:prstDash val="solid"/>
+                    </a:lnL>
+                    <a:lnR w="9525">
+                      <a:solidFill>
+                        <a:srgbClr val="888888"/>
+                      </a:solidFill>
+                      <a:prstDash val="solid"/>
+                    </a:lnR>
+                    <a:lnB w="9525">
+                      <a:solidFill>
+                        <a:srgbClr val="888888"/>
+                      </a:solidFill>
+                      <a:prstDash val="solid"/>
+                    </a:lnB>
                     <a:solidFill>
                       <a:srgbClr val="FFFFFF"/>
                     </a:solidFill>
@@ -2683,6 +4187,18 @@
                     </a:p>
                   </a:txBody>
                   <a:tcPr marL="91440" marR="91440" marT="45720" marB="45720">
+                    <a:lnR w="9525">
+                      <a:solidFill>
+                        <a:srgbClr val="888888"/>
+                      </a:solidFill>
+                      <a:prstDash val="solid"/>
+                    </a:lnR>
+                    <a:lnB w="9525">
+                      <a:solidFill>
+                        <a:srgbClr val="888888"/>
+                      </a:solidFill>
+                      <a:prstDash val="solid"/>
+                    </a:lnB>
                     <a:solidFill>
                       <a:srgbClr val="FFFFFF"/>
                     </a:solidFill>
@@ -2707,6 +4223,18 @@
                     </a:p>
                   </a:txBody>
                   <a:tcPr marL="91440" marR="91440" marT="45720" marB="45720">
+                    <a:lnR w="9525">
+                      <a:solidFill>
+                        <a:srgbClr val="888888"/>
+                      </a:solidFill>
+                      <a:prstDash val="solid"/>
+                    </a:lnR>
+                    <a:lnB w="9525">
+                      <a:solidFill>
+                        <a:srgbClr val="888888"/>
+                      </a:solidFill>
+                      <a:prstDash val="solid"/>
+                    </a:lnB>
                     <a:solidFill>
                       <a:srgbClr val="FFFFFF"/>
                     </a:solidFill>
@@ -2720,7 +4248,7 @@
     </p:spTree>
     <p:extLst>
       <p:ext uri="{BB962C8B-B14F-4D97-AF65-F5344CB8AC3E}">
-        <p14:creationId xmlns:p14="http://schemas.microsoft.com/office/powerpoint/2010/main" val="848479714"/>
+        <p14:creationId xmlns:p14="http://schemas.microsoft.com/office/powerpoint/2010/main" val="758593180"/>
       </p:ext>
     </p:extLst>
   </p:cSld>
@@ -2751,7 +4279,7 @@
           <p:cNvPr id="8" name="">
             <a:extLst xmlns:a="http://schemas.openxmlformats.org/drawingml/2006/main">
               <a:ext uri="{FF2B5EF4-FFF2-40B4-BE49-F238E27FC236}">
-                <a16:creationId xmlns:a16="http://schemas.microsoft.com/office/drawing/2014/main" id="{BC5B4F82-6760-443F-85E6-C58837895FDD}"/>
+                <a16:creationId xmlns:a16="http://schemas.microsoft.com/office/drawing/2014/main" id="{C760CFF5-E870-4387-97B6-F8D867CCA179}"/>
               </a:ext>
             </a:extLst>
           </p:cNvPr>
@@ -2777,7 +4305,18 @@
           <a:bodyPr xmlns:a="http://schemas.openxmlformats.org/drawingml/2006/main" anchor="ctr">
             <a:noAutofit/>
           </a:bodyPr>
-          <a:lstStyle xmlns:a="http://schemas.openxmlformats.org/drawingml/2006/main"/>
+          <a:lstStyle xmlns:a="http://schemas.openxmlformats.org/drawingml/2006/main">
+            <a:defPPr algn="l">
+              <a:defRPr sz="2700" b="1">
+                <a:solidFill>
+                  <a:srgbClr val="161616"/>
+                </a:solidFill>
+                <a:latin typeface="Arial"/>
+                <a:ea typeface="Arial"/>
+                <a:cs typeface="Arial"/>
+              </a:defRPr>
+            </a:defPPr>
+          </a:lstStyle>
           <a:p xmlns:a="http://schemas.openxmlformats.org/drawingml/2006/main">
             <a:pPr algn="l">
               <a:defRPr sz="2700" b="1">
@@ -2808,7 +4347,7 @@
           <p:cNvPr id="2" name="">
             <a:extLst xmlns:a="http://schemas.openxmlformats.org/drawingml/2006/main">
               <a:ext uri="{FF2B5EF4-FFF2-40B4-BE49-F238E27FC236}">
-                <a16:creationId xmlns:a16="http://schemas.microsoft.com/office/drawing/2014/main" id="{9113E17C-76A0-4E2A-B23E-9AA8BA733D08}"/>
+                <a16:creationId xmlns:a16="http://schemas.microsoft.com/office/drawing/2014/main" id="{E8022670-8E5C-4DFC-8AF8-4CDF00E51476}"/>
               </a:ext>
             </a:extLst>
           </p:cNvPr>
@@ -2838,7 +4377,18 @@
         </p:spPr>
         <p:txBody>
           <a:bodyPr xmlns:a="http://schemas.openxmlformats.org/drawingml/2006/main" anchor="ctr"/>
-          <a:lstStyle xmlns:a="http://schemas.openxmlformats.org/drawingml/2006/main"/>
+          <a:lstStyle xmlns:a="http://schemas.openxmlformats.org/drawingml/2006/main">
+            <a:defPPr algn="ctr">
+              <a:defRPr sz="1875">
+                <a:solidFill>
+                  <a:srgbClr val="111111"/>
+                </a:solidFill>
+                <a:latin typeface="Arial"/>
+                <a:ea typeface="Arial"/>
+                <a:cs typeface="Arial"/>
+              </a:defRPr>
+            </a:defPPr>
+          </a:lstStyle>
           <a:p xmlns:a="http://schemas.openxmlformats.org/drawingml/2006/main">
             <a:pPr algn="ctr">
               <a:defRPr sz="1875">
@@ -2869,7 +4419,7 @@
           <p:cNvPr id="3" name="">
             <a:extLst xmlns:a="http://schemas.openxmlformats.org/drawingml/2006/main">
               <a:ext uri="{FF2B5EF4-FFF2-40B4-BE49-F238E27FC236}">
-                <a16:creationId xmlns:a16="http://schemas.microsoft.com/office/drawing/2014/main" id="{ED8C56E1-05A8-49F9-9AD6-6292C0FBBE31}"/>
+                <a16:creationId xmlns:a16="http://schemas.microsoft.com/office/drawing/2014/main" id="{C36FFC07-A26F-4F67-809A-D259C8F2A380}"/>
               </a:ext>
             </a:extLst>
           </p:cNvPr>
@@ -2899,7 +4449,7 @@
           <p:cNvPr id="4" name="">
             <a:extLst xmlns:a="http://schemas.openxmlformats.org/drawingml/2006/main">
               <a:ext uri="{FF2B5EF4-FFF2-40B4-BE49-F238E27FC236}">
-                <a16:creationId xmlns:a16="http://schemas.microsoft.com/office/drawing/2014/main" id="{6A83F78B-6B66-4487-9776-F7C066CC9405}"/>
+                <a16:creationId xmlns:a16="http://schemas.microsoft.com/office/drawing/2014/main" id="{EEA44967-5863-47F7-8EEB-7F6F7BA887B5}"/>
               </a:ext>
             </a:extLst>
           </p:cNvPr>
@@ -2929,7 +4479,18 @@
         </p:spPr>
         <p:txBody>
           <a:bodyPr xmlns:a="http://schemas.openxmlformats.org/drawingml/2006/main" anchor="ctr"/>
-          <a:lstStyle xmlns:a="http://schemas.openxmlformats.org/drawingml/2006/main"/>
+          <a:lstStyle xmlns:a="http://schemas.openxmlformats.org/drawingml/2006/main">
+            <a:defPPr algn="ctr">
+              <a:defRPr sz="1875">
+                <a:solidFill>
+                  <a:srgbClr val="111111"/>
+                </a:solidFill>
+                <a:latin typeface="Arial"/>
+                <a:ea typeface="Arial"/>
+                <a:cs typeface="Arial"/>
+              </a:defRPr>
+            </a:defPPr>
+          </a:lstStyle>
           <a:p xmlns:a="http://schemas.openxmlformats.org/drawingml/2006/main">
             <a:pPr algn="ctr">
               <a:defRPr sz="1875">
@@ -2960,7 +4521,7 @@
           <p:cNvPr id="5" name="">
             <a:extLst xmlns:a="http://schemas.openxmlformats.org/drawingml/2006/main">
               <a:ext uri="{FF2B5EF4-FFF2-40B4-BE49-F238E27FC236}">
-                <a16:creationId xmlns:a16="http://schemas.microsoft.com/office/drawing/2014/main" id="{E1DE5AF1-E2BB-45B6-AD4F-0FB94E9C7A5A}"/>
+                <a16:creationId xmlns:a16="http://schemas.microsoft.com/office/drawing/2014/main" id="{D86F1E7F-F9F0-40D6-9591-12D5C20F7DAD}"/>
               </a:ext>
             </a:extLst>
           </p:cNvPr>
@@ -2990,7 +4551,7 @@
           <p:cNvPr id="6" name="">
             <a:extLst xmlns:a="http://schemas.openxmlformats.org/drawingml/2006/main">
               <a:ext uri="{FF2B5EF4-FFF2-40B4-BE49-F238E27FC236}">
-                <a16:creationId xmlns:a16="http://schemas.microsoft.com/office/drawing/2014/main" id="{BE22C510-082E-46B3-BCC8-78211A22D8B2}"/>
+                <a16:creationId xmlns:a16="http://schemas.microsoft.com/office/drawing/2014/main" id="{363EBF18-028E-415D-9B22-E681CC30A5B4}"/>
               </a:ext>
             </a:extLst>
           </p:cNvPr>
@@ -3020,7 +4581,18 @@
         </p:spPr>
         <p:txBody>
           <a:bodyPr xmlns:a="http://schemas.openxmlformats.org/drawingml/2006/main" anchor="ctr"/>
-          <a:lstStyle xmlns:a="http://schemas.openxmlformats.org/drawingml/2006/main"/>
+          <a:lstStyle xmlns:a="http://schemas.openxmlformats.org/drawingml/2006/main">
+            <a:defPPr algn="ctr">
+              <a:defRPr sz="1875">
+                <a:solidFill>
+                  <a:srgbClr val="111111"/>
+                </a:solidFill>
+                <a:latin typeface="Arial"/>
+                <a:ea typeface="Arial"/>
+                <a:cs typeface="Arial"/>
+              </a:defRPr>
+            </a:defPPr>
+          </a:lstStyle>
           <a:p xmlns:a="http://schemas.openxmlformats.org/drawingml/2006/main">
             <a:pPr algn="ctr">
               <a:defRPr sz="1875">
@@ -3051,7 +4623,7 @@
           <p:cNvPr id="7" name="">
             <a:extLst xmlns:a="http://schemas.openxmlformats.org/drawingml/2006/main">
               <a:ext uri="{FF2B5EF4-FFF2-40B4-BE49-F238E27FC236}">
-                <a16:creationId xmlns:a16="http://schemas.microsoft.com/office/drawing/2014/main" id="{95C80615-4E3C-473D-ACBA-2FA7AA3BD45B}"/>
+                <a16:creationId xmlns:a16="http://schemas.microsoft.com/office/drawing/2014/main" id="{E686AB05-6369-4D73-9C6D-02D618D4AFCA}"/>
               </a:ext>
             </a:extLst>
           </p:cNvPr>
@@ -3077,7 +4649,18 @@
           <a:bodyPr xmlns:a="http://schemas.openxmlformats.org/drawingml/2006/main">
             <a:noAutofit/>
           </a:bodyPr>
-          <a:lstStyle xmlns:a="http://schemas.openxmlformats.org/drawingml/2006/main"/>
+          <a:lstStyle xmlns:a="http://schemas.openxmlformats.org/drawingml/2006/main">
+            <a:defPPr>
+              <a:defRPr sz="2175" b="0">
+                <a:solidFill>
+                  <a:srgbClr val="161616"/>
+                </a:solidFill>
+                <a:latin typeface="Arial"/>
+                <a:ea typeface="Arial"/>
+                <a:cs typeface="Arial"/>
+              </a:defRPr>
+            </a:defPPr>
+          </a:lstStyle>
           <a:p xmlns:a="http://schemas.openxmlformats.org/drawingml/2006/main">
             <a:pPr>
               <a:defRPr sz="2175" b="0">
@@ -3106,7 +4689,7 @@
     </p:spTree>
     <p:extLst>
       <p:ext uri="{BB962C8B-B14F-4D97-AF65-F5344CB8AC3E}">
-        <p14:creationId xmlns:p14="http://schemas.microsoft.com/office/powerpoint/2010/main" val="1074456735"/>
+        <p14:creationId xmlns:p14="http://schemas.microsoft.com/office/powerpoint/2010/main" val="676362700"/>
       </p:ext>
     </p:extLst>
   </p:cSld>
@@ -3137,7 +4720,7 @@
           <p:cNvPr id="3" name="">
             <a:extLst xmlns:a="http://schemas.openxmlformats.org/drawingml/2006/main">
               <a:ext uri="{FF2B5EF4-FFF2-40B4-BE49-F238E27FC236}">
-                <a16:creationId xmlns:a16="http://schemas.microsoft.com/office/drawing/2014/main" id="{2AECC2B9-21D9-432B-AC01-E529F532879A}"/>
+                <a16:creationId xmlns:a16="http://schemas.microsoft.com/office/drawing/2014/main" id="{398F7F1C-008A-4D37-A58C-1FD3FFCC5DB2}"/>
               </a:ext>
             </a:extLst>
           </p:cNvPr>
@@ -3163,7 +4746,18 @@
           <a:bodyPr xmlns:a="http://schemas.openxmlformats.org/drawingml/2006/main" anchor="ctr">
             <a:noAutofit/>
           </a:bodyPr>
-          <a:lstStyle xmlns:a="http://schemas.openxmlformats.org/drawingml/2006/main"/>
+          <a:lstStyle xmlns:a="http://schemas.openxmlformats.org/drawingml/2006/main">
+            <a:defPPr algn="l">
+              <a:defRPr sz="2700" b="1">
+                <a:solidFill>
+                  <a:srgbClr val="161616"/>
+                </a:solidFill>
+                <a:latin typeface="Arial"/>
+                <a:ea typeface="Arial"/>
+                <a:cs typeface="Arial"/>
+              </a:defRPr>
+            </a:defPPr>
+          </a:lstStyle>
           <a:p xmlns:a="http://schemas.openxmlformats.org/drawingml/2006/main">
             <a:pPr algn="l">
               <a:defRPr sz="2700" b="1">
@@ -3191,7 +4785,13 @@
       </p:sp>
       <p:graphicFrame>
         <p:nvGraphicFramePr>
-          <p:cNvPr id="4" name=""/>
+          <p:cNvPr id="2" name="">
+            <a:extLst xmlns:a="http://schemas.openxmlformats.org/drawingml/2006/main">
+              <a:ext uri="{FF2B5EF4-FFF2-40B4-BE49-F238E27FC236}">
+                <a16:creationId xmlns:a16="http://schemas.microsoft.com/office/drawing/2014/main" id="{EDCB2430-0AEE-4CC4-AA10-E50FABB7AB85}"/>
+              </a:ext>
+            </a:extLst>
+          </p:cNvPr>
           <p:cNvGraphicFramePr/>
           <p:nvPr/>
         </p:nvGraphicFramePr>
@@ -3227,6 +4827,30 @@
                     </a:p>
                   </a:txBody>
                   <a:tcPr marL="91440" marR="91440" marT="45720" marB="45720">
+                    <a:lnL w="9525">
+                      <a:solidFill>
+                        <a:srgbClr val="888888"/>
+                      </a:solidFill>
+                      <a:prstDash val="solid"/>
+                    </a:lnL>
+                    <a:lnR w="9525">
+                      <a:solidFill>
+                        <a:srgbClr val="888888"/>
+                      </a:solidFill>
+                      <a:prstDash val="solid"/>
+                    </a:lnR>
+                    <a:lnT w="9525">
+                      <a:solidFill>
+                        <a:srgbClr val="888888"/>
+                      </a:solidFill>
+                      <a:prstDash val="solid"/>
+                    </a:lnT>
+                    <a:lnB w="9525">
+                      <a:solidFill>
+                        <a:srgbClr val="888888"/>
+                      </a:solidFill>
+                      <a:prstDash val="solid"/>
+                    </a:lnB>
                     <a:solidFill>
                       <a:srgbClr val="F1F1F1"/>
                     </a:solidFill>
@@ -3251,6 +4875,24 @@
                     </a:p>
                   </a:txBody>
                   <a:tcPr marL="91440" marR="91440" marT="45720" marB="45720">
+                    <a:lnR w="9525">
+                      <a:solidFill>
+                        <a:srgbClr val="888888"/>
+                      </a:solidFill>
+                      <a:prstDash val="solid"/>
+                    </a:lnR>
+                    <a:lnT w="9525">
+                      <a:solidFill>
+                        <a:srgbClr val="888888"/>
+                      </a:solidFill>
+                      <a:prstDash val="solid"/>
+                    </a:lnT>
+                    <a:lnB w="9525">
+                      <a:solidFill>
+                        <a:srgbClr val="888888"/>
+                      </a:solidFill>
+                      <a:prstDash val="solid"/>
+                    </a:lnB>
                     <a:solidFill>
                       <a:srgbClr val="F1F1F1"/>
                     </a:solidFill>
@@ -3277,6 +4919,24 @@
                     </a:p>
                   </a:txBody>
                   <a:tcPr marL="91440" marR="91440" marT="45720" marB="45720">
+                    <a:lnL w="9525">
+                      <a:solidFill>
+                        <a:srgbClr val="888888"/>
+                      </a:solidFill>
+                      <a:prstDash val="solid"/>
+                    </a:lnL>
+                    <a:lnR w="9525">
+                      <a:solidFill>
+                        <a:srgbClr val="888888"/>
+                      </a:solidFill>
+                      <a:prstDash val="solid"/>
+                    </a:lnR>
+                    <a:lnB w="9525">
+                      <a:solidFill>
+                        <a:srgbClr val="888888"/>
+                      </a:solidFill>
+                      <a:prstDash val="solid"/>
+                    </a:lnB>
                     <a:solidFill>
                       <a:srgbClr val="FFFFFF"/>
                     </a:solidFill>
@@ -3301,6 +4961,18 @@
                     </a:p>
                   </a:txBody>
                   <a:tcPr marL="91440" marR="91440" marT="45720" marB="45720">
+                    <a:lnR w="9525">
+                      <a:solidFill>
+                        <a:srgbClr val="888888"/>
+                      </a:solidFill>
+                      <a:prstDash val="solid"/>
+                    </a:lnR>
+                    <a:lnB w="9525">
+                      <a:solidFill>
+                        <a:srgbClr val="888888"/>
+                      </a:solidFill>
+                      <a:prstDash val="solid"/>
+                    </a:lnB>
                     <a:solidFill>
                       <a:srgbClr val="FFFFFF"/>
                     </a:solidFill>
@@ -3327,6 +4999,24 @@
                     </a:p>
                   </a:txBody>
                   <a:tcPr marL="91440" marR="91440" marT="45720" marB="45720">
+                    <a:lnL w="9525">
+                      <a:solidFill>
+                        <a:srgbClr val="888888"/>
+                      </a:solidFill>
+                      <a:prstDash val="solid"/>
+                    </a:lnL>
+                    <a:lnR w="9525">
+                      <a:solidFill>
+                        <a:srgbClr val="888888"/>
+                      </a:solidFill>
+                      <a:prstDash val="solid"/>
+                    </a:lnR>
+                    <a:lnB w="9525">
+                      <a:solidFill>
+                        <a:srgbClr val="888888"/>
+                      </a:solidFill>
+                      <a:prstDash val="solid"/>
+                    </a:lnB>
                     <a:solidFill>
                       <a:srgbClr val="FFFFFF"/>
                     </a:solidFill>
@@ -3351,6 +5041,18 @@
                     </a:p>
                   </a:txBody>
                   <a:tcPr marL="91440" marR="91440" marT="45720" marB="45720">
+                    <a:lnR w="9525">
+                      <a:solidFill>
+                        <a:srgbClr val="888888"/>
+                      </a:solidFill>
+                      <a:prstDash val="solid"/>
+                    </a:lnR>
+                    <a:lnB w="9525">
+                      <a:solidFill>
+                        <a:srgbClr val="888888"/>
+                      </a:solidFill>
+                      <a:prstDash val="solid"/>
+                    </a:lnB>
                     <a:solidFill>
                       <a:srgbClr val="FFFFFF"/>
                     </a:solidFill>
@@ -3377,6 +5079,24 @@
                     </a:p>
                   </a:txBody>
                   <a:tcPr marL="91440" marR="91440" marT="45720" marB="45720">
+                    <a:lnL w="9525">
+                      <a:solidFill>
+                        <a:srgbClr val="888888"/>
+                      </a:solidFill>
+                      <a:prstDash val="solid"/>
+                    </a:lnL>
+                    <a:lnR w="9525">
+                      <a:solidFill>
+                        <a:srgbClr val="888888"/>
+                      </a:solidFill>
+                      <a:prstDash val="solid"/>
+                    </a:lnR>
+                    <a:lnB w="9525">
+                      <a:solidFill>
+                        <a:srgbClr val="888888"/>
+                      </a:solidFill>
+                      <a:prstDash val="solid"/>
+                    </a:lnB>
                     <a:solidFill>
                       <a:srgbClr val="FFFFFF"/>
                     </a:solidFill>
@@ -3401,6 +5121,18 @@
                     </a:p>
                   </a:txBody>
                   <a:tcPr marL="91440" marR="91440" marT="45720" marB="45720">
+                    <a:lnR w="9525">
+                      <a:solidFill>
+                        <a:srgbClr val="888888"/>
+                      </a:solidFill>
+                      <a:prstDash val="solid"/>
+                    </a:lnR>
+                    <a:lnB w="9525">
+                      <a:solidFill>
+                        <a:srgbClr val="888888"/>
+                      </a:solidFill>
+                      <a:prstDash val="solid"/>
+                    </a:lnB>
                     <a:solidFill>
                       <a:srgbClr val="FFFFFF"/>
                     </a:solidFill>
@@ -3427,6 +5159,24 @@
                     </a:p>
                   </a:txBody>
                   <a:tcPr marL="91440" marR="91440" marT="45720" marB="45720">
+                    <a:lnL w="9525">
+                      <a:solidFill>
+                        <a:srgbClr val="888888"/>
+                      </a:solidFill>
+                      <a:prstDash val="solid"/>
+                    </a:lnL>
+                    <a:lnR w="9525">
+                      <a:solidFill>
+                        <a:srgbClr val="888888"/>
+                      </a:solidFill>
+                      <a:prstDash val="solid"/>
+                    </a:lnR>
+                    <a:lnB w="9525">
+                      <a:solidFill>
+                        <a:srgbClr val="888888"/>
+                      </a:solidFill>
+                      <a:prstDash val="solid"/>
+                    </a:lnB>
                     <a:solidFill>
                       <a:srgbClr val="FFFFFF"/>
                     </a:solidFill>
@@ -3451,6 +5201,18 @@
                     </a:p>
                   </a:txBody>
                   <a:tcPr marL="91440" marR="91440" marT="45720" marB="45720">
+                    <a:lnR w="9525">
+                      <a:solidFill>
+                        <a:srgbClr val="888888"/>
+                      </a:solidFill>
+                      <a:prstDash val="solid"/>
+                    </a:lnR>
+                    <a:lnB w="9525">
+                      <a:solidFill>
+                        <a:srgbClr val="888888"/>
+                      </a:solidFill>
+                      <a:prstDash val="solid"/>
+                    </a:lnB>
                     <a:solidFill>
                       <a:srgbClr val="FFFFFF"/>
                     </a:solidFill>
@@ -3477,6 +5239,24 @@
                     </a:p>
                   </a:txBody>
                   <a:tcPr marL="91440" marR="91440" marT="45720" marB="45720">
+                    <a:lnL w="9525">
+                      <a:solidFill>
+                        <a:srgbClr val="888888"/>
+                      </a:solidFill>
+                      <a:prstDash val="solid"/>
+                    </a:lnL>
+                    <a:lnR w="9525">
+                      <a:solidFill>
+                        <a:srgbClr val="888888"/>
+                      </a:solidFill>
+                      <a:prstDash val="solid"/>
+                    </a:lnR>
+                    <a:lnB w="9525">
+                      <a:solidFill>
+                        <a:srgbClr val="888888"/>
+                      </a:solidFill>
+                      <a:prstDash val="solid"/>
+                    </a:lnB>
                     <a:solidFill>
                       <a:srgbClr val="FFFFFF"/>
                     </a:solidFill>
@@ -3501,6 +5281,18 @@
                     </a:p>
                   </a:txBody>
                   <a:tcPr marL="91440" marR="91440" marT="45720" marB="45720">
+                    <a:lnR w="9525">
+                      <a:solidFill>
+                        <a:srgbClr val="888888"/>
+                      </a:solidFill>
+                      <a:prstDash val="solid"/>
+                    </a:lnR>
+                    <a:lnB w="9525">
+                      <a:solidFill>
+                        <a:srgbClr val="888888"/>
+                      </a:solidFill>
+                      <a:prstDash val="solid"/>
+                    </a:lnB>
                     <a:solidFill>
                       <a:srgbClr val="FFFFFF"/>
                     </a:solidFill>
@@ -3514,7 +5306,7 @@
     </p:spTree>
     <p:extLst>
       <p:ext uri="{BB962C8B-B14F-4D97-AF65-F5344CB8AC3E}">
-        <p14:creationId xmlns:p14="http://schemas.microsoft.com/office/powerpoint/2010/main" val="1265282419"/>
+        <p14:creationId xmlns:p14="http://schemas.microsoft.com/office/powerpoint/2010/main" val="1541146556"/>
       </p:ext>
     </p:extLst>
   </p:cSld>
@@ -3545,7 +5337,7 @@
           <p:cNvPr id="6" name="">
             <a:extLst xmlns:a="http://schemas.openxmlformats.org/drawingml/2006/main">
               <a:ext uri="{FF2B5EF4-FFF2-40B4-BE49-F238E27FC236}">
-                <a16:creationId xmlns:a16="http://schemas.microsoft.com/office/drawing/2014/main" id="{6DB7BA9D-84E6-4C72-9E79-11692B269F55}"/>
+                <a16:creationId xmlns:a16="http://schemas.microsoft.com/office/drawing/2014/main" id="{8A7656A2-C943-4340-8347-D052E2466D78}"/>
               </a:ext>
             </a:extLst>
           </p:cNvPr>
@@ -3571,7 +5363,18 @@
           <a:bodyPr xmlns:a="http://schemas.openxmlformats.org/drawingml/2006/main" anchor="ctr">
             <a:noAutofit/>
           </a:bodyPr>
-          <a:lstStyle xmlns:a="http://schemas.openxmlformats.org/drawingml/2006/main"/>
+          <a:lstStyle xmlns:a="http://schemas.openxmlformats.org/drawingml/2006/main">
+            <a:defPPr algn="l">
+              <a:defRPr sz="2700" b="1">
+                <a:solidFill>
+                  <a:srgbClr val="161616"/>
+                </a:solidFill>
+                <a:latin typeface="Arial"/>
+                <a:ea typeface="Arial"/>
+                <a:cs typeface="Arial"/>
+              </a:defRPr>
+            </a:defPPr>
+          </a:lstStyle>
           <a:p xmlns:a="http://schemas.openxmlformats.org/drawingml/2006/main">
             <a:pPr algn="l">
               <a:defRPr sz="2700" b="1">
@@ -3602,7 +5405,7 @@
           <p:cNvPr id="2" name="">
             <a:extLst xmlns:a="http://schemas.openxmlformats.org/drawingml/2006/main">
               <a:ext uri="{FF2B5EF4-FFF2-40B4-BE49-F238E27FC236}">
-                <a16:creationId xmlns:a16="http://schemas.microsoft.com/office/drawing/2014/main" id="{BEB76A70-AB43-47F7-9847-AAD9341B55EA}"/>
+                <a16:creationId xmlns:a16="http://schemas.microsoft.com/office/drawing/2014/main" id="{4B4FDE9A-CDEB-41E9-A6B0-4C6C6F1E3236}"/>
               </a:ext>
             </a:extLst>
           </p:cNvPr>
@@ -3628,7 +5431,18 @@
           <a:bodyPr xmlns:a="http://schemas.openxmlformats.org/drawingml/2006/main">
             <a:noAutofit/>
           </a:bodyPr>
-          <a:lstStyle xmlns:a="http://schemas.openxmlformats.org/drawingml/2006/main"/>
+          <a:lstStyle xmlns:a="http://schemas.openxmlformats.org/drawingml/2006/main">
+            <a:defPPr>
+              <a:defRPr sz="2175" b="0">
+                <a:solidFill>
+                  <a:srgbClr val="161616"/>
+                </a:solidFill>
+                <a:latin typeface="Arial"/>
+                <a:ea typeface="Arial"/>
+                <a:cs typeface="Arial"/>
+              </a:defRPr>
+            </a:defPPr>
+          </a:lstStyle>
           <a:p xmlns:a="http://schemas.openxmlformats.org/drawingml/2006/main">
             <a:pPr>
               <a:defRPr sz="2175" b="0">
@@ -3659,7 +5473,7 @@
           <p:cNvPr id="3" name="">
             <a:extLst xmlns:a="http://schemas.openxmlformats.org/drawingml/2006/main">
               <a:ext uri="{FF2B5EF4-FFF2-40B4-BE49-F238E27FC236}">
-                <a16:creationId xmlns:a16="http://schemas.microsoft.com/office/drawing/2014/main" id="{1D2C1BDF-4DF4-4041-9C02-6BA78B4AF1D5}"/>
+                <a16:creationId xmlns:a16="http://schemas.microsoft.com/office/drawing/2014/main" id="{C44E9D93-89B8-4B21-9F4D-4F222D812966}"/>
               </a:ext>
             </a:extLst>
           </p:cNvPr>
@@ -3685,7 +5499,18 @@
           <a:bodyPr xmlns:a="http://schemas.openxmlformats.org/drawingml/2006/main">
             <a:noAutofit/>
           </a:bodyPr>
-          <a:lstStyle xmlns:a="http://schemas.openxmlformats.org/drawingml/2006/main"/>
+          <a:lstStyle xmlns:a="http://schemas.openxmlformats.org/drawingml/2006/main">
+            <a:defPPr>
+              <a:defRPr sz="2175" b="0">
+                <a:solidFill>
+                  <a:srgbClr val="161616"/>
+                </a:solidFill>
+                <a:latin typeface="Arial"/>
+                <a:ea typeface="Arial"/>
+                <a:cs typeface="Arial"/>
+              </a:defRPr>
+            </a:defPPr>
+          </a:lstStyle>
           <a:p xmlns:a="http://schemas.openxmlformats.org/drawingml/2006/main">
             <a:pPr>
               <a:defRPr sz="2175" b="0">
@@ -3706,7 +5531,7 @@
                 <a:ea typeface="Arial"/>
                 <a:cs typeface="Arial"/>
               </a:rPr>
-              <a:t>FK сохраняют принадлежность слотов, версий и предложений.</a:t>
+              <a:t>Внешние ключи сохраняют принадлежность слотов, версий и предложений.</a:t>
             </a:r>
           </a:p>
         </p:txBody>
@@ -3716,7 +5541,7 @@
           <p:cNvPr id="4" name="">
             <a:extLst xmlns:a="http://schemas.openxmlformats.org/drawingml/2006/main">
               <a:ext uri="{FF2B5EF4-FFF2-40B4-BE49-F238E27FC236}">
-                <a16:creationId xmlns:a16="http://schemas.microsoft.com/office/drawing/2014/main" id="{70977364-9CC6-46A1-A21A-FEFB3BC514DE}"/>
+                <a16:creationId xmlns:a16="http://schemas.microsoft.com/office/drawing/2014/main" id="{8905DD0F-F7B0-4805-96CC-9AFC0A5E7AF1}"/>
               </a:ext>
             </a:extLst>
           </p:cNvPr>
@@ -3742,7 +5567,18 @@
           <a:bodyPr xmlns:a="http://schemas.openxmlformats.org/drawingml/2006/main">
             <a:noAutofit/>
           </a:bodyPr>
-          <a:lstStyle xmlns:a="http://schemas.openxmlformats.org/drawingml/2006/main"/>
+          <a:lstStyle xmlns:a="http://schemas.openxmlformats.org/drawingml/2006/main">
+            <a:defPPr>
+              <a:defRPr sz="2175" b="0">
+                <a:solidFill>
+                  <a:srgbClr val="161616"/>
+                </a:solidFill>
+                <a:latin typeface="Arial"/>
+                <a:ea typeface="Arial"/>
+                <a:cs typeface="Arial"/>
+              </a:defRPr>
+            </a:defPPr>
+          </a:lstStyle>
           <a:p xmlns:a="http://schemas.openxmlformats.org/drawingml/2006/main">
             <a:pPr>
               <a:defRPr sz="2175" b="0">
@@ -3773,7 +5609,7 @@
           <p:cNvPr id="5" name="">
             <a:extLst xmlns:a="http://schemas.openxmlformats.org/drawingml/2006/main">
               <a:ext uri="{FF2B5EF4-FFF2-40B4-BE49-F238E27FC236}">
-                <a16:creationId xmlns:a16="http://schemas.microsoft.com/office/drawing/2014/main" id="{91724D67-201A-4A95-9CFC-50CB44AD15A8}"/>
+                <a16:creationId xmlns:a16="http://schemas.microsoft.com/office/drawing/2014/main" id="{427C0D67-3182-4379-9A91-4A8C3E80AA5C}"/>
               </a:ext>
             </a:extLst>
           </p:cNvPr>
@@ -3799,7 +5635,18 @@
           <a:bodyPr xmlns:a="http://schemas.openxmlformats.org/drawingml/2006/main">
             <a:noAutofit/>
           </a:bodyPr>
-          <a:lstStyle xmlns:a="http://schemas.openxmlformats.org/drawingml/2006/main"/>
+          <a:lstStyle xmlns:a="http://schemas.openxmlformats.org/drawingml/2006/main">
+            <a:defPPr>
+              <a:defRPr sz="2175" b="0">
+                <a:solidFill>
+                  <a:srgbClr val="161616"/>
+                </a:solidFill>
+                <a:latin typeface="Arial"/>
+                <a:ea typeface="Arial"/>
+                <a:cs typeface="Arial"/>
+              </a:defRPr>
+            </a:defPPr>
+          </a:lstStyle>
           <a:p xmlns:a="http://schemas.openxmlformats.org/drawingml/2006/main">
             <a:pPr>
               <a:defRPr sz="2175" b="0">
@@ -3820,7 +5667,7 @@
                 <a:ea typeface="Arial"/>
                 <a:cs typeface="Arial"/>
               </a:rPr>
-              <a:t>Все 185 атрибутов раскрыты в словаре и физической модели.</a:t>
+              <a:t>Все 185 атрибутов и 47 связей представлены в единой логической модели.</a:t>
             </a:r>
           </a:p>
         </p:txBody>
@@ -3828,7 +5675,7 @@
     </p:spTree>
     <p:extLst>
       <p:ext uri="{BB962C8B-B14F-4D97-AF65-F5344CB8AC3E}">
-        <p14:creationId xmlns:p14="http://schemas.microsoft.com/office/powerpoint/2010/main" val="1900678131"/>
+        <p14:creationId xmlns:p14="http://schemas.microsoft.com/office/powerpoint/2010/main" val="672469430"/>
       </p:ext>
     </p:extLst>
   </p:cSld>
@@ -3876,16 +5723,16 @@
         <a:srgbClr val="96607D"/>
       </a:folHlink>
     </a:clrScheme>
-    <a:fontScheme name="Office">
+    <a:fontScheme name="">
       <a:majorFont>
-        <a:latin typeface="Calibri Light"/>
-        <a:ea typeface="Calibri Light"/>
-        <a:cs typeface="Calibri Light"/>
+        <a:latin typeface="Aptos"/>
+        <a:ea typeface=""/>
+        <a:cs typeface=""/>
       </a:majorFont>
       <a:minorFont>
-        <a:latin typeface="Calibri"/>
-        <a:ea typeface="Calibri"/>
-        <a:cs typeface="Calibri"/>
+        <a:latin typeface="Aptos"/>
+        <a:ea typeface=""/>
+        <a:cs typeface=""/>
       </a:minorFont>
     </a:fontScheme>
     <a:fmtScheme name="ChatGPT">
